--- a/docs/tutorials/rap-bo-book-catalog/examples/book-catalog/report.simple-deck.pptx
+++ b/docs/tutorials/rap-bo-book-catalog/examples/book-catalog/report.simple-deck.pptx
@@ -22,6 +22,7 @@
     <p:sldId id="264" r:id="rId21"/>
     <p:sldId id="265" r:id="rId22"/>
     <p:sldId id="266" r:id="rId23"/>
+    <p:sldId id="267" r:id="rId24"/>
   </p:sldIdLst>
   <p:sldSz cx="12192000" cy="6858000"/>
   <p:notesSz cx="6858000" cy="9144000"/>
@@ -34203,7 +34204,7 @@
           <a:lstStyle/>
           <a:p>
             <a:r>
-              <a:t>Two failure modes · how to catch them</a:t>
+              <a:t>What got built · 72 objects, all active</a:t>
             </a:r>
           </a:p>
         </p:txBody>
@@ -34224,7 +34225,7 @@
           <a:lstStyle/>
           <a:p>
             <a:r>
-              <a:t>DRIFT · HALLUCINATION</a:t>
+              <a:t>4 ENTITIES · 1 RAP APP</a:t>
             </a:r>
           </a:p>
         </p:txBody>
@@ -34272,14 +34273,724 @@
       </p:sp>
       <p:sp>
         <p:nvSpPr>
-          <p:cNvPr id="5" name="c_1_BlockGrid:0:c_1_Block"/>
+          <p:cNvPr id="5" name="c_1_BlockGrid:0:c_1_Block:container"/>
           <p:cNvSpPr/>
           <p:nvPr/>
         </p:nvSpPr>
         <p:spPr>
           <a:xfrm>
             <a:off x="457200" y="1463040"/>
-            <a:ext cx="3566160" cy="4663440"/>
+            <a:ext cx="2697480" cy="1554480"/>
+          </a:xfrm>
+          <a:prstGeom prst="rect">
+            <a:avLst/>
+          </a:prstGeom>
+          <a:noFill/>
+          <a:ln>
+            <a:noFill/>
+          </a:ln>
+        </p:spPr>
+        <p:style>
+          <a:lnRef idx="1">
+            <a:schemeClr val="accent1"/>
+          </a:lnRef>
+          <a:fillRef idx="3">
+            <a:schemeClr val="accent1"/>
+          </a:fillRef>
+          <a:effectRef idx="2">
+            <a:schemeClr val="accent1"/>
+          </a:effectRef>
+          <a:fontRef idx="minor">
+            <a:schemeClr val="lt1"/>
+          </a:fontRef>
+        </p:style>
+        <p:txBody>
+          <a:bodyPr rtlCol="0" anchor="ctr"/>
+          <a:lstStyle/>
+          <a:p>
+            <a:pPr algn="ctr"/>
+          </a:p>
+        </p:txBody>
+      </p:sp>
+      <p:sp>
+        <p:nvSpPr>
+          <p:cNvPr id="6" name="c_1_BlockGrid:0:c_1_Block:metric"/>
+          <p:cNvSpPr txBox="1"/>
+          <p:nvPr/>
+        </p:nvSpPr>
+        <p:spPr>
+          <a:xfrm>
+            <a:off x="640080" y="1600200"/>
+            <a:ext cx="2331720" cy="408939"/>
+          </a:xfrm>
+          <a:prstGeom prst="rect">
+            <a:avLst/>
+          </a:prstGeom>
+          <a:noFill/>
+        </p:spPr>
+        <p:txBody>
+          <a:bodyPr wrap="none" lIns="0" rIns="0" tIns="0" bIns="0">
+            <a:spAutoFit/>
+          </a:bodyPr>
+          <a:lstStyle/>
+          <a:p>
+            <a:pPr algn="ctr"/>
+            <a:r>
+              <a:rPr sz="2800" b="1">
+                <a:solidFill>
+                  <a:srgbClr val="107E8D"/>
+                </a:solidFill>
+              </a:rPr>
+              <a:t>72</a:t>
+            </a:r>
+          </a:p>
+        </p:txBody>
+      </p:sp>
+      <p:sp>
+        <p:nvSpPr>
+          <p:cNvPr id="7" name="c_1_BlockGrid:0:c_1_Block:content"/>
+          <p:cNvSpPr txBox="1"/>
+          <p:nvPr/>
+        </p:nvSpPr>
+        <p:spPr>
+          <a:xfrm>
+            <a:off x="640080" y="2077719"/>
+            <a:ext cx="2331720" cy="219074"/>
+          </a:xfrm>
+          <a:prstGeom prst="rect">
+            <a:avLst/>
+          </a:prstGeom>
+          <a:noFill/>
+        </p:spPr>
+        <p:txBody>
+          <a:bodyPr wrap="square" lIns="0" rIns="0" tIns="0" bIns="0" anchor="t"/>
+          <a:lstStyle/>
+          <a:p>
+            <a:pPr algn="ctr"/>
+            <a:r>
+              <a:rPr sz="1400">
+                <a:solidFill>
+                  <a:srgbClr val="000000"/>
+                </a:solidFill>
+              </a:rPr>
+              <a:t>objects active</a:t>
+            </a:r>
+          </a:p>
+        </p:txBody>
+      </p:sp>
+      <p:sp>
+        <p:nvSpPr>
+          <p:cNvPr id="8" name="c_1_BlockGrid:1:c_2_Block:container"/>
+          <p:cNvSpPr/>
+          <p:nvPr/>
+        </p:nvSpPr>
+        <p:spPr>
+          <a:xfrm>
+            <a:off x="3246120" y="1463040"/>
+            <a:ext cx="2697480" cy="1554480"/>
+          </a:xfrm>
+          <a:prstGeom prst="rect">
+            <a:avLst/>
+          </a:prstGeom>
+          <a:noFill/>
+          <a:ln>
+            <a:noFill/>
+          </a:ln>
+        </p:spPr>
+        <p:style>
+          <a:lnRef idx="1">
+            <a:schemeClr val="accent1"/>
+          </a:lnRef>
+          <a:fillRef idx="3">
+            <a:schemeClr val="accent1"/>
+          </a:fillRef>
+          <a:effectRef idx="2">
+            <a:schemeClr val="accent1"/>
+          </a:effectRef>
+          <a:fontRef idx="minor">
+            <a:schemeClr val="lt1"/>
+          </a:fontRef>
+        </p:style>
+        <p:txBody>
+          <a:bodyPr rtlCol="0" anchor="ctr"/>
+          <a:lstStyle/>
+          <a:p>
+            <a:pPr algn="ctr"/>
+          </a:p>
+        </p:txBody>
+      </p:sp>
+      <p:sp>
+        <p:nvSpPr>
+          <p:cNvPr id="9" name="c_1_BlockGrid:1:c_2_Block:metric"/>
+          <p:cNvSpPr txBox="1"/>
+          <p:nvPr/>
+        </p:nvSpPr>
+        <p:spPr>
+          <a:xfrm>
+            <a:off x="3429000" y="1600200"/>
+            <a:ext cx="2331720" cy="408939"/>
+          </a:xfrm>
+          <a:prstGeom prst="rect">
+            <a:avLst/>
+          </a:prstGeom>
+          <a:noFill/>
+        </p:spPr>
+        <p:txBody>
+          <a:bodyPr wrap="none" lIns="0" rIns="0" tIns="0" bIns="0">
+            <a:spAutoFit/>
+          </a:bodyPr>
+          <a:lstStyle/>
+          <a:p>
+            <a:pPr algn="ctr"/>
+            <a:r>
+              <a:rPr sz="2800" b="1">
+                <a:solidFill>
+                  <a:srgbClr val="0047FF"/>
+                </a:solidFill>
+              </a:rPr>
+              <a:t>77</a:t>
+            </a:r>
+          </a:p>
+        </p:txBody>
+      </p:sp>
+      <p:sp>
+        <p:nvSpPr>
+          <p:cNvPr id="10" name="c_1_BlockGrid:1:c_2_Block:content"/>
+          <p:cNvSpPr txBox="1"/>
+          <p:nvPr/>
+        </p:nvSpPr>
+        <p:spPr>
+          <a:xfrm>
+            <a:off x="3429000" y="2077719"/>
+            <a:ext cx="2331720" cy="219074"/>
+          </a:xfrm>
+          <a:prstGeom prst="rect">
+            <a:avLst/>
+          </a:prstGeom>
+          <a:noFill/>
+        </p:spPr>
+        <p:txBody>
+          <a:bodyPr wrap="square" lIns="0" rIns="0" tIns="0" bIns="0" anchor="t"/>
+          <a:lstStyle/>
+          <a:p>
+            <a:pPr algn="ctr"/>
+            <a:r>
+              <a:rPr sz="1400">
+                <a:solidFill>
+                  <a:srgbClr val="000000"/>
+                </a:solidFill>
+              </a:rPr>
+              <a:t>API prompts in P4</a:t>
+            </a:r>
+          </a:p>
+        </p:txBody>
+      </p:sp>
+      <p:sp>
+        <p:nvSpPr>
+          <p:cNvPr id="11" name="c_1_BlockGrid:2:c_3_Block:container"/>
+          <p:cNvSpPr/>
+          <p:nvPr/>
+        </p:nvSpPr>
+        <p:spPr>
+          <a:xfrm>
+            <a:off x="6035040" y="1463040"/>
+            <a:ext cx="2697480" cy="1554480"/>
+          </a:xfrm>
+          <a:prstGeom prst="rect">
+            <a:avLst/>
+          </a:prstGeom>
+          <a:noFill/>
+          <a:ln>
+            <a:noFill/>
+          </a:ln>
+        </p:spPr>
+        <p:style>
+          <a:lnRef idx="1">
+            <a:schemeClr val="accent1"/>
+          </a:lnRef>
+          <a:fillRef idx="3">
+            <a:schemeClr val="accent1"/>
+          </a:fillRef>
+          <a:effectRef idx="2">
+            <a:schemeClr val="accent1"/>
+          </a:effectRef>
+          <a:fontRef idx="minor">
+            <a:schemeClr val="lt1"/>
+          </a:fontRef>
+        </p:style>
+        <p:txBody>
+          <a:bodyPr rtlCol="0" anchor="ctr"/>
+          <a:lstStyle/>
+          <a:p>
+            <a:pPr algn="ctr"/>
+          </a:p>
+        </p:txBody>
+      </p:sp>
+      <p:sp>
+        <p:nvSpPr>
+          <p:cNvPr id="12" name="c_1_BlockGrid:2:c_3_Block:metric"/>
+          <p:cNvSpPr txBox="1"/>
+          <p:nvPr/>
+        </p:nvSpPr>
+        <p:spPr>
+          <a:xfrm>
+            <a:off x="6217920" y="1600200"/>
+            <a:ext cx="2331720" cy="408939"/>
+          </a:xfrm>
+          <a:prstGeom prst="rect">
+            <a:avLst/>
+          </a:prstGeom>
+          <a:noFill/>
+        </p:spPr>
+        <p:txBody>
+          <a:bodyPr wrap="none" lIns="0" rIns="0" tIns="0" bIns="0">
+            <a:spAutoFit/>
+          </a:bodyPr>
+          <a:lstStyle/>
+          <a:p>
+            <a:pPr algn="ctr"/>
+            <a:r>
+              <a:rPr sz="2800" b="1">
+                <a:solidFill>
+                  <a:srgbClr val="E06C00"/>
+                </a:solidFill>
+              </a:rPr>
+              <a:t>~$19</a:t>
+            </a:r>
+          </a:p>
+        </p:txBody>
+      </p:sp>
+      <p:sp>
+        <p:nvSpPr>
+          <p:cNvPr id="13" name="c_1_BlockGrid:2:c_3_Block:content"/>
+          <p:cNvSpPr txBox="1"/>
+          <p:nvPr/>
+        </p:nvSpPr>
+        <p:spPr>
+          <a:xfrm>
+            <a:off x="6217920" y="2077719"/>
+            <a:ext cx="2331720" cy="219074"/>
+          </a:xfrm>
+          <a:prstGeom prst="rect">
+            <a:avLst/>
+          </a:prstGeom>
+          <a:noFill/>
+        </p:spPr>
+        <p:txBody>
+          <a:bodyPr wrap="square" lIns="0" rIns="0" tIns="0" bIns="0" anchor="t"/>
+          <a:lstStyle/>
+          <a:p>
+            <a:pPr algn="ctr"/>
+            <a:r>
+              <a:rPr sz="1400">
+                <a:solidFill>
+                  <a:srgbClr val="000000"/>
+                </a:solidFill>
+              </a:rPr>
+              <a:t>API cost · vs ~$2k manual</a:t>
+            </a:r>
+          </a:p>
+        </p:txBody>
+      </p:sp>
+      <p:sp>
+        <p:nvSpPr>
+          <p:cNvPr id="14" name="c_1_BlockGrid:3:c_4_Block:container"/>
+          <p:cNvSpPr/>
+          <p:nvPr/>
+        </p:nvSpPr>
+        <p:spPr>
+          <a:xfrm>
+            <a:off x="8823960" y="1463040"/>
+            <a:ext cx="2697480" cy="1554480"/>
+          </a:xfrm>
+          <a:prstGeom prst="rect">
+            <a:avLst/>
+          </a:prstGeom>
+          <a:noFill/>
+          <a:ln>
+            <a:noFill/>
+          </a:ln>
+        </p:spPr>
+        <p:style>
+          <a:lnRef idx="1">
+            <a:schemeClr val="accent1"/>
+          </a:lnRef>
+          <a:fillRef idx="3">
+            <a:schemeClr val="accent1"/>
+          </a:fillRef>
+          <a:effectRef idx="2">
+            <a:schemeClr val="accent1"/>
+          </a:effectRef>
+          <a:fontRef idx="minor">
+            <a:schemeClr val="lt1"/>
+          </a:fontRef>
+        </p:style>
+        <p:txBody>
+          <a:bodyPr rtlCol="0" anchor="ctr"/>
+          <a:lstStyle/>
+          <a:p>
+            <a:pPr algn="ctr"/>
+          </a:p>
+        </p:txBody>
+      </p:sp>
+      <p:sp>
+        <p:nvSpPr>
+          <p:cNvPr id="15" name="c_1_BlockGrid:3:c_4_Block:metric"/>
+          <p:cNvSpPr txBox="1"/>
+          <p:nvPr/>
+        </p:nvSpPr>
+        <p:spPr>
+          <a:xfrm>
+            <a:off x="9006840" y="1600200"/>
+            <a:ext cx="2331720" cy="408939"/>
+          </a:xfrm>
+          <a:prstGeom prst="rect">
+            <a:avLst/>
+          </a:prstGeom>
+          <a:noFill/>
+        </p:spPr>
+        <p:txBody>
+          <a:bodyPr wrap="none" lIns="0" rIns="0" tIns="0" bIns="0">
+            <a:spAutoFit/>
+          </a:bodyPr>
+          <a:lstStyle/>
+          <a:p>
+            <a:pPr algn="ctr"/>
+            <a:r>
+              <a:rPr sz="2800" b="1">
+                <a:solidFill>
+                  <a:srgbClr val="E614EB"/>
+                </a:solidFill>
+              </a:rPr>
+              <a:t>~3h</a:t>
+            </a:r>
+          </a:p>
+        </p:txBody>
+      </p:sp>
+      <p:sp>
+        <p:nvSpPr>
+          <p:cNvPr id="16" name="c_1_BlockGrid:3:c_4_Block:content"/>
+          <p:cNvSpPr txBox="1"/>
+          <p:nvPr/>
+        </p:nvSpPr>
+        <p:spPr>
+          <a:xfrm>
+            <a:off x="9006840" y="2077719"/>
+            <a:ext cx="2331720" cy="219074"/>
+          </a:xfrm>
+          <a:prstGeom prst="rect">
+            <a:avLst/>
+          </a:prstGeom>
+          <a:noFill/>
+        </p:spPr>
+        <p:txBody>
+          <a:bodyPr wrap="square" lIns="0" rIns="0" tIns="0" bIns="0" anchor="t"/>
+          <a:lstStyle/>
+          <a:p>
+            <a:pPr algn="ctr"/>
+            <a:r>
+              <a:rPr sz="1400">
+                <a:solidFill>
+                  <a:srgbClr val="000000"/>
+                </a:solidFill>
+              </a:rPr>
+              <a:t>wall-clock · vs ~2 weeks</a:t>
+            </a:r>
+          </a:p>
+        </p:txBody>
+      </p:sp>
+      <p:sp>
+        <p:nvSpPr>
+          <p:cNvPr id="17" name="c_2_BlockGrid:0:c_5_Block"/>
+          <p:cNvSpPr/>
+          <p:nvPr/>
+        </p:nvSpPr>
+        <p:spPr>
+          <a:xfrm>
+            <a:off x="457200" y="3200400"/>
+            <a:ext cx="3566160" cy="2926080"/>
+          </a:xfrm>
+          <a:prstGeom prst="rect">
+            <a:avLst/>
+          </a:prstGeom>
+          <a:gradFill rotWithShape="1">
+            <a:gsLst>
+              <a:gs pos="0">
+                <a:srgbClr val="003FE5"/>
+              </a:gs>
+              <a:gs pos="100000">
+                <a:srgbClr val="1959FF"/>
+              </a:gs>
+            </a:gsLst>
+            <a:lin ang="16200000" scaled="0"/>
+          </a:gradFill>
+          <a:ln w="3175">
+            <a:solidFill>
+              <a:srgbClr val="4B5366"/>
+            </a:solidFill>
+          </a:ln>
+        </p:spPr>
+        <p:style>
+          <a:lnRef idx="1">
+            <a:schemeClr val="accent1"/>
+          </a:lnRef>
+          <a:fillRef idx="3">
+            <a:schemeClr val="accent1"/>
+          </a:fillRef>
+          <a:effectRef idx="2">
+            <a:schemeClr val="accent1"/>
+          </a:effectRef>
+          <a:fontRef idx="minor">
+            <a:schemeClr val="lt1"/>
+          </a:fontRef>
+        </p:style>
+        <p:txBody>
+          <a:bodyPr rtlCol="0" anchor="t" wrap="square" tIns="91440" bIns="91440"/>
+          <a:lstStyle/>
+          <a:p>
+            <a:pPr algn="l">
+              <a:spcAft>
+                <a:spcPts val="500"/>
+              </a:spcAft>
+            </a:pPr>
+            <a:r>
+              <a:rPr sz="1400" b="1">
+                <a:solidFill>
+                  <a:srgbClr val="FFFFFF"/>
+                </a:solidFill>
+              </a:rPr>
+              <a:t>DDIC layer</a:t>
+            </a:r>
+          </a:p>
+          <a:p>
+            <a:pPr algn="l" marL="228600" indent="-182880">
+              <a:spcAft>
+                <a:spcPts val="0"/>
+              </a:spcAft>
+              <a:buClr>
+                <a:srgbClr val="FFFFFF"/>
+              </a:buClr>
+              <a:buChar char="•"/>
+            </a:pPr>
+            <a:r>
+              <a:rPr sz="1100">
+                <a:solidFill>
+                  <a:srgbClr val="FFFFFF"/>
+                </a:solidFill>
+              </a:rPr>
+              <a:t>20 domains (DOMA)</a:t>
+            </a:r>
+          </a:p>
+          <a:p>
+            <a:pPr algn="l" marL="228600" indent="-182880">
+              <a:spcAft>
+                <a:spcPts val="0"/>
+              </a:spcAft>
+              <a:buClr>
+                <a:srgbClr val="FFFFFF"/>
+              </a:buClr>
+              <a:buChar char="•"/>
+            </a:pPr>
+            <a:r>
+              <a:rPr sz="1100">
+                <a:solidFill>
+                  <a:srgbClr val="FFFFFF"/>
+                </a:solidFill>
+              </a:rPr>
+              <a:t>20 data elements (DTEL)</a:t>
+            </a:r>
+          </a:p>
+          <a:p>
+            <a:pPr algn="l" marL="228600" indent="-182880">
+              <a:spcAft>
+                <a:spcPts val="0"/>
+              </a:spcAft>
+              <a:buClr>
+                <a:srgbClr val="FFFFFF"/>
+              </a:buClr>
+              <a:buChar char="•"/>
+            </a:pPr>
+            <a:r>
+              <a:rPr sz="1100">
+                <a:solidFill>
+                  <a:srgbClr val="FFFFFF"/>
+                </a:solidFill>
+              </a:rPr>
+              <a:t>4 persistent tables (TABL)</a:t>
+            </a:r>
+          </a:p>
+          <a:p>
+            <a:pPr algn="l" marL="228600" indent="-182880">
+              <a:spcAft>
+                <a:spcPts val="0"/>
+              </a:spcAft>
+              <a:buClr>
+                <a:srgbClr val="FFFFFF"/>
+              </a:buClr>
+              <a:buChar char="•"/>
+            </a:pPr>
+            <a:r>
+              <a:rPr sz="1100">
+                <a:solidFill>
+                  <a:srgbClr val="FFFFFF"/>
+                </a:solidFill>
+              </a:rPr>
+              <a:t>4 draft tables (TABL _D)</a:t>
+            </a:r>
+          </a:p>
+        </p:txBody>
+      </p:sp>
+      <p:sp>
+        <p:nvSpPr>
+          <p:cNvPr id="18" name="c_2_BlockGrid:1:c_6_Block"/>
+          <p:cNvSpPr/>
+          <p:nvPr/>
+        </p:nvSpPr>
+        <p:spPr>
+          <a:xfrm>
+            <a:off x="4206240" y="3200400"/>
+            <a:ext cx="3566160" cy="2926080"/>
+          </a:xfrm>
+          <a:prstGeom prst="rect">
+            <a:avLst/>
+          </a:prstGeom>
+          <a:gradFill rotWithShape="1">
+            <a:gsLst>
+              <a:gs pos="0">
+                <a:srgbClr val="0D6976"/>
+              </a:gs>
+              <a:gs pos="100000">
+                <a:srgbClr val="1292A3"/>
+              </a:gs>
+            </a:gsLst>
+            <a:lin ang="16200000" scaled="0"/>
+          </a:gradFill>
+          <a:ln w="3175">
+            <a:solidFill>
+              <a:srgbClr val="303B3D"/>
+            </a:solidFill>
+          </a:ln>
+        </p:spPr>
+        <p:style>
+          <a:lnRef idx="1">
+            <a:schemeClr val="accent1"/>
+          </a:lnRef>
+          <a:fillRef idx="3">
+            <a:schemeClr val="accent1"/>
+          </a:fillRef>
+          <a:effectRef idx="2">
+            <a:schemeClr val="accent1"/>
+          </a:effectRef>
+          <a:fontRef idx="minor">
+            <a:schemeClr val="lt1"/>
+          </a:fontRef>
+        </p:style>
+        <p:txBody>
+          <a:bodyPr rtlCol="0" anchor="t" wrap="square" tIns="91440" bIns="91440"/>
+          <a:lstStyle/>
+          <a:p>
+            <a:pPr algn="l">
+              <a:spcAft>
+                <a:spcPts val="500"/>
+              </a:spcAft>
+            </a:pPr>
+            <a:r>
+              <a:rPr sz="1400" b="1">
+                <a:solidFill>
+                  <a:srgbClr val="FFFFFF"/>
+                </a:solidFill>
+              </a:rPr>
+              <a:t>RAP layer</a:t>
+            </a:r>
+          </a:p>
+          <a:p>
+            <a:pPr algn="l" marL="228600" indent="-182880">
+              <a:spcAft>
+                <a:spcPts val="0"/>
+              </a:spcAft>
+              <a:buClr>
+                <a:srgbClr val="FFFFFF"/>
+              </a:buClr>
+              <a:buChar char="•"/>
+            </a:pPr>
+            <a:r>
+              <a:rPr sz="1100">
+                <a:solidFill>
+                  <a:srgbClr val="FFFFFF"/>
+                </a:solidFill>
+              </a:rPr>
+              <a:t>4 interface CDS (Z##_R_*)</a:t>
+            </a:r>
+          </a:p>
+          <a:p>
+            <a:pPr algn="l" marL="228600" indent="-182880">
+              <a:spcAft>
+                <a:spcPts val="0"/>
+              </a:spcAft>
+              <a:buClr>
+                <a:srgbClr val="FFFFFF"/>
+              </a:buClr>
+              <a:buChar char="•"/>
+            </a:pPr>
+            <a:r>
+              <a:rPr sz="1100">
+                <a:solidFill>
+                  <a:srgbClr val="FFFFFF"/>
+                </a:solidFill>
+              </a:rPr>
+              <a:t>4 projection CDS (Z##_C_*)</a:t>
+            </a:r>
+          </a:p>
+          <a:p>
+            <a:pPr algn="l" marL="228600" indent="-182880">
+              <a:spcAft>
+                <a:spcPts val="0"/>
+              </a:spcAft>
+              <a:buClr>
+                <a:srgbClr val="FFFFFF"/>
+              </a:buClr>
+              <a:buChar char="•"/>
+            </a:pPr>
+            <a:r>
+              <a:rPr sz="1100">
+                <a:solidFill>
+                  <a:srgbClr val="FFFFFF"/>
+                </a:solidFill>
+              </a:rPr>
+              <a:t>4 metadata extensions</a:t>
+            </a:r>
+          </a:p>
+          <a:p>
+            <a:pPr algn="l" marL="228600" indent="-182880">
+              <a:spcAft>
+                <a:spcPts val="0"/>
+              </a:spcAft>
+              <a:buClr>
+                <a:srgbClr val="FFFFFF"/>
+              </a:buClr>
+              <a:buChar char="•"/>
+            </a:pPr>
+            <a:r>
+              <a:rPr sz="1100">
+                <a:solidFill>
+                  <a:srgbClr val="FFFFFF"/>
+                </a:solidFill>
+              </a:rPr>
+              <a:t>4 BDEF + 4 BIMP classes</a:t>
+            </a:r>
+          </a:p>
+        </p:txBody>
+      </p:sp>
+      <p:sp>
+        <p:nvSpPr>
+          <p:cNvPr id="19" name="c_2_BlockGrid:2:c_7_Block"/>
+          <p:cNvSpPr/>
+          <p:nvPr/>
+        </p:nvSpPr>
+        <p:spPr>
+          <a:xfrm>
+            <a:off x="7955280" y="3200400"/>
+            <a:ext cx="3566160" cy="2926080"/>
           </a:xfrm>
           <a:prstGeom prst="rect">
             <a:avLst/>
@@ -34330,275 +35041,83 @@
                   <a:srgbClr val="000000"/>
                 </a:solidFill>
               </a:rPr>
-              <a:t>Spec / plan drift</a:t>
-            </a:r>
-          </a:p>
-          <a:p>
-            <a:pPr algn="l">
+              <a:t>Service · UI</a:t>
+            </a:r>
+          </a:p>
+          <a:p>
+            <a:pPr algn="l" marL="228600" indent="-182880">
               <a:spcAft>
                 <a:spcPts val="0"/>
               </a:spcAft>
+              <a:buClr>
+                <a:srgbClr val="000000"/>
+              </a:buClr>
+              <a:buChar char="•"/>
             </a:pPr>
             <a:r>
-              <a:rPr sz="1400" b="1">
+              <a:rPr sz="1100">
                 <a:solidFill>
                   <a:srgbClr val="000000"/>
                 </a:solidFill>
               </a:rPr>
-              <a:t>Symptom: </a:t>
-            </a:r>
-            <a:r>
-              <a:rPr sz="1400">
-                <a:solidFill>
-                  <a:srgbClr val="000000"/>
-                </a:solidFill>
-              </a:rPr>
-              <a:t>extra objects, missing ones, silent renames.</a:t>
-            </a:r>
-          </a:p>
-          <a:p>
-            <a:pPr algn="l">
+              <a:t>1 service definition</a:t>
+            </a:r>
+          </a:p>
+          <a:p>
+            <a:pPr algn="l" marL="228600" indent="-182880">
               <a:spcAft>
                 <a:spcPts val="0"/>
               </a:spcAft>
+              <a:buClr>
+                <a:srgbClr val="000000"/>
+              </a:buClr>
+              <a:buChar char="•"/>
             </a:pPr>
             <a:r>
-              <a:rPr sz="1400" b="1">
+              <a:rPr sz="1100">
                 <a:solidFill>
                   <a:srgbClr val="000000"/>
                 </a:solidFill>
               </a:rPr>
-              <a:t>Catch: </a:t>
-            </a:r>
-            <a:r>
-              <a:rPr sz="1400">
-                <a:solidFill>
-                  <a:srgbClr val="000000"/>
-                </a:solidFill>
-              </a:rPr>
-              <a:t>quote the plan back; force exact list.</a:t>
-            </a:r>
-          </a:p>
-        </p:txBody>
-      </p:sp>
-      <p:sp>
-        <p:nvSpPr>
-          <p:cNvPr id="6" name="c_1_BlockGrid:1:c_2_Block"/>
-          <p:cNvSpPr/>
-          <p:nvPr/>
-        </p:nvSpPr>
-        <p:spPr>
-          <a:xfrm>
-            <a:off x="4206240" y="1463040"/>
-            <a:ext cx="3566160" cy="4663440"/>
-          </a:xfrm>
-          <a:prstGeom prst="rect">
-            <a:avLst/>
-          </a:prstGeom>
-          <a:gradFill rotWithShape="1">
-            <a:gsLst>
-              <a:gs pos="0">
-                <a:srgbClr val="CE0101"/>
-              </a:gs>
-              <a:gs pos="100000">
-                <a:srgbClr val="FC0606"/>
-              </a:gs>
-            </a:gsLst>
-            <a:lin ang="16200000" scaled="0"/>
-          </a:gradFill>
-          <a:ln w="3175">
-            <a:solidFill>
-              <a:srgbClr val="5D4545"/>
-            </a:solidFill>
-          </a:ln>
-        </p:spPr>
-        <p:style>
-          <a:lnRef idx="1">
-            <a:schemeClr val="accent1"/>
-          </a:lnRef>
-          <a:fillRef idx="3">
-            <a:schemeClr val="accent1"/>
-          </a:fillRef>
-          <a:effectRef idx="2">
-            <a:schemeClr val="accent1"/>
-          </a:effectRef>
-          <a:fontRef idx="minor">
-            <a:schemeClr val="lt1"/>
-          </a:fontRef>
-        </p:style>
-        <p:txBody>
-          <a:bodyPr rtlCol="0" anchor="t" wrap="square" tIns="91440" bIns="91440"/>
-          <a:lstStyle/>
-          <a:p>
-            <a:pPr algn="l">
-              <a:spcAft>
-                <a:spcPts val="500"/>
-              </a:spcAft>
-            </a:pPr>
-            <a:r>
-              <a:rPr sz="1400" b="1">
-                <a:solidFill>
-                  <a:srgbClr val="FFFFFF"/>
-                </a:solidFill>
-              </a:rPr>
-              <a:t>Hallucination</a:t>
-            </a:r>
-          </a:p>
-          <a:p>
-            <a:pPr algn="l">
+              <a:t>1 OData V4 binding (published)</a:t>
+            </a:r>
+          </a:p>
+          <a:p>
+            <a:pPr algn="l" marL="228600" indent="-182880">
               <a:spcAft>
                 <a:spcPts val="0"/>
               </a:spcAft>
+              <a:buClr>
+                <a:srgbClr val="000000"/>
+              </a:buClr>
+              <a:buChar char="•"/>
             </a:pPr>
             <a:r>
-              <a:rPr sz="1400" b="1">
-                <a:solidFill>
-                  <a:srgbClr val="FFFFFF"/>
+              <a:rPr sz="1100">
+                <a:solidFill>
+                  <a:srgbClr val="000000"/>
                 </a:solidFill>
               </a:rPr>
-              <a:t>Symptom: </a:t>
-            </a:r>
-            <a:r>
-              <a:rPr sz="1400">
-                <a:solidFill>
-                  <a:srgbClr val="FFFFFF"/>
-                </a:solidFill>
-              </a:rPr>
-              <a:t>"All N active" with no Executing trace.</a:t>
-            </a:r>
-          </a:p>
-          <a:p>
-            <a:pPr algn="l">
+              <a:t>Fiori Elements preview · CRUD + draft</a:t>
+            </a:r>
+          </a:p>
+          <a:p>
+            <a:pPr algn="l" marL="228600" indent="-182880">
               <a:spcAft>
                 <a:spcPts val="0"/>
               </a:spcAft>
+              <a:buClr>
+                <a:srgbClr val="000000"/>
+              </a:buClr>
+              <a:buChar char="•"/>
             </a:pPr>
             <a:r>
-              <a:rPr sz="1400" b="1">
-                <a:solidFill>
-                  <a:srgbClr val="FFFFFF"/>
+              <a:rPr sz="1100">
+                <a:solidFill>
+                  <a:srgbClr val="000000"/>
                 </a:solidFill>
               </a:rPr>
-              <a:t>Catch: </a:t>
-            </a:r>
-            <a:r>
-              <a:rPr sz="1400">
-                <a:solidFill>
-                  <a:srgbClr val="FFFFFF"/>
-                </a:solidFill>
-              </a:rPr>
-              <a:t>low token count · ask agent to read each object back.</a:t>
-            </a:r>
-          </a:p>
-        </p:txBody>
-      </p:sp>
-      <p:sp>
-        <p:nvSpPr>
-          <p:cNvPr id="7" name="c_1_BlockGrid:2:c_3_Block"/>
-          <p:cNvSpPr/>
-          <p:nvPr/>
-        </p:nvSpPr>
-        <p:spPr>
-          <a:xfrm>
-            <a:off x="7955280" y="1463040"/>
-            <a:ext cx="3566160" cy="4663440"/>
-          </a:xfrm>
-          <a:prstGeom prst="rect">
-            <a:avLst/>
-          </a:prstGeom>
-          <a:gradFill rotWithShape="1">
-            <a:gsLst>
-              <a:gs pos="0">
-                <a:srgbClr val="CF12D3"/>
-              </a:gs>
-              <a:gs pos="100000">
-                <a:srgbClr val="E82BED"/>
-              </a:gs>
-            </a:gsLst>
-            <a:lin ang="16200000" scaled="0"/>
-          </a:gradFill>
-          <a:ln w="3175">
-            <a:solidFill>
-              <a:srgbClr val="644D64"/>
-            </a:solidFill>
-          </a:ln>
-        </p:spPr>
-        <p:style>
-          <a:lnRef idx="1">
-            <a:schemeClr val="accent1"/>
-          </a:lnRef>
-          <a:fillRef idx="3">
-            <a:schemeClr val="accent1"/>
-          </a:fillRef>
-          <a:effectRef idx="2">
-            <a:schemeClr val="accent1"/>
-          </a:effectRef>
-          <a:fontRef idx="minor">
-            <a:schemeClr val="lt1"/>
-          </a:fontRef>
-        </p:style>
-        <p:txBody>
-          <a:bodyPr rtlCol="0" anchor="t" wrap="square" tIns="91440" bIns="91440"/>
-          <a:lstStyle/>
-          <a:p>
-            <a:pPr algn="l">
-              <a:spcAft>
-                <a:spcPts val="500"/>
-              </a:spcAft>
-            </a:pPr>
-            <a:r>
-              <a:rPr sz="1400" b="1">
-                <a:solidFill>
-                  <a:srgbClr val="FFFFFF"/>
-                </a:solidFill>
-              </a:rPr>
-              <a:t>Phase confusion</a:t>
-            </a:r>
-          </a:p>
-          <a:p>
-            <a:pPr algn="l">
-              <a:spcAft>
-                <a:spcPts val="0"/>
-              </a:spcAft>
-            </a:pPr>
-            <a:r>
-              <a:rPr sz="1400" b="1">
-                <a:solidFill>
-                  <a:srgbClr val="FFFFFF"/>
-                </a:solidFill>
-              </a:rPr>
-              <a:t>Symptom: </a:t>
-            </a:r>
-            <a:r>
-              <a:rPr sz="1400">
-                <a:solidFill>
-                  <a:srgbClr val="FFFFFF"/>
-                </a:solidFill>
-              </a:rPr>
-              <a:t>Create/Update runs during Phase 1-3.</a:t>
-            </a:r>
-          </a:p>
-          <a:p>
-            <a:pPr algn="l">
-              <a:spcAft>
-                <a:spcPts val="0"/>
-              </a:spcAft>
-            </a:pPr>
-            <a:r>
-              <a:rPr sz="1400" b="1">
-                <a:solidFill>
-                  <a:srgbClr val="FFFFFF"/>
-                </a:solidFill>
-              </a:rPr>
-              <a:t>Catch: </a:t>
-            </a:r>
-            <a:r>
-              <a:rPr sz="1400">
-                <a:solidFill>
-                  <a:srgbClr val="FFFFFF"/>
-                </a:solidFill>
-              </a:rPr>
-              <a:t>say "document only, not system" · revert.</a:t>
+              <a:t>Author shows by name, not UUID</a:t>
             </a:r>
           </a:p>
         </p:txBody>
@@ -34637,6 +35156,440 @@
           <a:lstStyle/>
           <a:p>
             <a:r>
+              <a:t>Two failure modes · how to catch them</a:t>
+            </a:r>
+          </a:p>
+        </p:txBody>
+      </p:sp>
+      <p:sp>
+        <p:nvSpPr>
+          <p:cNvPr id="3" name="Text Placeholder 2"/>
+          <p:cNvSpPr>
+            <a:spLocks noGrp="1"/>
+          </p:cNvSpPr>
+          <p:nvPr>
+            <p:ph type="body" idx="15" sz="quarter"/>
+          </p:nvPr>
+        </p:nvSpPr>
+        <p:spPr/>
+        <p:txBody>
+          <a:bodyPr/>
+          <a:lstStyle/>
+          <a:p>
+            <a:r>
+              <a:t>DRIFT · HALLUCINATION</a:t>
+            </a:r>
+          </a:p>
+        </p:txBody>
+      </p:sp>
+      <p:sp>
+        <p:nvSpPr>
+          <p:cNvPr id="4" name="ContentArea"/>
+          <p:cNvSpPr/>
+          <p:nvPr/>
+        </p:nvSpPr>
+        <p:spPr>
+          <a:xfrm>
+            <a:off x="457200" y="1463040"/>
+            <a:ext cx="11064240" cy="4663440"/>
+          </a:xfrm>
+          <a:prstGeom prst="rect">
+            <a:avLst/>
+          </a:prstGeom>
+          <a:noFill/>
+          <a:ln>
+            <a:noFill/>
+          </a:ln>
+        </p:spPr>
+        <p:style>
+          <a:lnRef idx="1">
+            <a:schemeClr val="accent1"/>
+          </a:lnRef>
+          <a:fillRef idx="3">
+            <a:schemeClr val="accent1"/>
+          </a:fillRef>
+          <a:effectRef idx="2">
+            <a:schemeClr val="accent1"/>
+          </a:effectRef>
+          <a:fontRef idx="minor">
+            <a:schemeClr val="lt1"/>
+          </a:fontRef>
+        </p:style>
+        <p:txBody>
+          <a:bodyPr rtlCol="0" anchor="ctr"/>
+          <a:lstStyle/>
+          <a:p>
+            <a:pPr algn="ctr"/>
+          </a:p>
+        </p:txBody>
+      </p:sp>
+      <p:sp>
+        <p:nvSpPr>
+          <p:cNvPr id="5" name="c_1_BlockGrid:0:c_1_Block"/>
+          <p:cNvSpPr/>
+          <p:nvPr/>
+        </p:nvSpPr>
+        <p:spPr>
+          <a:xfrm>
+            <a:off x="457200" y="1463040"/>
+            <a:ext cx="3566160" cy="4663440"/>
+          </a:xfrm>
+          <a:prstGeom prst="rect">
+            <a:avLst/>
+          </a:prstGeom>
+          <a:gradFill rotWithShape="1">
+            <a:gsLst>
+              <a:gs pos="0">
+                <a:srgbClr val="C65F00"/>
+              </a:gs>
+              <a:gs pos="100000">
+                <a:srgbClr val="F97800"/>
+              </a:gs>
+            </a:gsLst>
+            <a:lin ang="16200000" scaled="0"/>
+          </a:gradFill>
+          <a:ln w="3175">
+            <a:solidFill>
+              <a:srgbClr val="5A4D42"/>
+            </a:solidFill>
+          </a:ln>
+        </p:spPr>
+        <p:style>
+          <a:lnRef idx="1">
+            <a:schemeClr val="accent1"/>
+          </a:lnRef>
+          <a:fillRef idx="3">
+            <a:schemeClr val="accent1"/>
+          </a:fillRef>
+          <a:effectRef idx="2">
+            <a:schemeClr val="accent1"/>
+          </a:effectRef>
+          <a:fontRef idx="minor">
+            <a:schemeClr val="lt1"/>
+          </a:fontRef>
+        </p:style>
+        <p:txBody>
+          <a:bodyPr rtlCol="0" anchor="t" wrap="square" tIns="91440" bIns="91440"/>
+          <a:lstStyle/>
+          <a:p>
+            <a:pPr algn="l">
+              <a:spcAft>
+                <a:spcPts val="500"/>
+              </a:spcAft>
+            </a:pPr>
+            <a:r>
+              <a:rPr sz="1400" b="1">
+                <a:solidFill>
+                  <a:srgbClr val="000000"/>
+                </a:solidFill>
+              </a:rPr>
+              <a:t>Spec / plan drift</a:t>
+            </a:r>
+          </a:p>
+          <a:p>
+            <a:pPr algn="l">
+              <a:spcAft>
+                <a:spcPts val="0"/>
+              </a:spcAft>
+            </a:pPr>
+            <a:r>
+              <a:rPr sz="1400" b="1">
+                <a:solidFill>
+                  <a:srgbClr val="000000"/>
+                </a:solidFill>
+              </a:rPr>
+              <a:t>Symptom: </a:t>
+            </a:r>
+            <a:r>
+              <a:rPr sz="1400">
+                <a:solidFill>
+                  <a:srgbClr val="000000"/>
+                </a:solidFill>
+              </a:rPr>
+              <a:t>extra objects, missing ones, silent renames.</a:t>
+            </a:r>
+          </a:p>
+          <a:p>
+            <a:pPr algn="l">
+              <a:spcAft>
+                <a:spcPts val="0"/>
+              </a:spcAft>
+            </a:pPr>
+            <a:r>
+              <a:rPr sz="1400" b="1">
+                <a:solidFill>
+                  <a:srgbClr val="000000"/>
+                </a:solidFill>
+              </a:rPr>
+              <a:t>Catch: </a:t>
+            </a:r>
+            <a:r>
+              <a:rPr sz="1400">
+                <a:solidFill>
+                  <a:srgbClr val="000000"/>
+                </a:solidFill>
+              </a:rPr>
+              <a:t>quote the plan back; force exact list.</a:t>
+            </a:r>
+          </a:p>
+        </p:txBody>
+      </p:sp>
+      <p:sp>
+        <p:nvSpPr>
+          <p:cNvPr id="6" name="c_1_BlockGrid:1:c_2_Block"/>
+          <p:cNvSpPr/>
+          <p:nvPr/>
+        </p:nvSpPr>
+        <p:spPr>
+          <a:xfrm>
+            <a:off x="4206240" y="1463040"/>
+            <a:ext cx="3566160" cy="4663440"/>
+          </a:xfrm>
+          <a:prstGeom prst="rect">
+            <a:avLst/>
+          </a:prstGeom>
+          <a:gradFill rotWithShape="1">
+            <a:gsLst>
+              <a:gs pos="0">
+                <a:srgbClr val="CE0101"/>
+              </a:gs>
+              <a:gs pos="100000">
+                <a:srgbClr val="FC0606"/>
+              </a:gs>
+            </a:gsLst>
+            <a:lin ang="16200000" scaled="0"/>
+          </a:gradFill>
+          <a:ln w="3175">
+            <a:solidFill>
+              <a:srgbClr val="5D4545"/>
+            </a:solidFill>
+          </a:ln>
+        </p:spPr>
+        <p:style>
+          <a:lnRef idx="1">
+            <a:schemeClr val="accent1"/>
+          </a:lnRef>
+          <a:fillRef idx="3">
+            <a:schemeClr val="accent1"/>
+          </a:fillRef>
+          <a:effectRef idx="2">
+            <a:schemeClr val="accent1"/>
+          </a:effectRef>
+          <a:fontRef idx="minor">
+            <a:schemeClr val="lt1"/>
+          </a:fontRef>
+        </p:style>
+        <p:txBody>
+          <a:bodyPr rtlCol="0" anchor="t" wrap="square" tIns="91440" bIns="91440"/>
+          <a:lstStyle/>
+          <a:p>
+            <a:pPr algn="l">
+              <a:spcAft>
+                <a:spcPts val="500"/>
+              </a:spcAft>
+            </a:pPr>
+            <a:r>
+              <a:rPr sz="1400" b="1">
+                <a:solidFill>
+                  <a:srgbClr val="FFFFFF"/>
+                </a:solidFill>
+              </a:rPr>
+              <a:t>Hallucination</a:t>
+            </a:r>
+          </a:p>
+          <a:p>
+            <a:pPr algn="l">
+              <a:spcAft>
+                <a:spcPts val="0"/>
+              </a:spcAft>
+            </a:pPr>
+            <a:r>
+              <a:rPr sz="1400" b="1">
+                <a:solidFill>
+                  <a:srgbClr val="FFFFFF"/>
+                </a:solidFill>
+              </a:rPr>
+              <a:t>Symptom: </a:t>
+            </a:r>
+            <a:r>
+              <a:rPr sz="1400">
+                <a:solidFill>
+                  <a:srgbClr val="FFFFFF"/>
+                </a:solidFill>
+              </a:rPr>
+              <a:t>"All N active" with no Executing trace.</a:t>
+            </a:r>
+          </a:p>
+          <a:p>
+            <a:pPr algn="l">
+              <a:spcAft>
+                <a:spcPts val="0"/>
+              </a:spcAft>
+            </a:pPr>
+            <a:r>
+              <a:rPr sz="1400" b="1">
+                <a:solidFill>
+                  <a:srgbClr val="FFFFFF"/>
+                </a:solidFill>
+              </a:rPr>
+              <a:t>Catch: </a:t>
+            </a:r>
+            <a:r>
+              <a:rPr sz="1400">
+                <a:solidFill>
+                  <a:srgbClr val="FFFFFF"/>
+                </a:solidFill>
+              </a:rPr>
+              <a:t>low token count · ask agent to read each object back.</a:t>
+            </a:r>
+          </a:p>
+        </p:txBody>
+      </p:sp>
+      <p:sp>
+        <p:nvSpPr>
+          <p:cNvPr id="7" name="c_1_BlockGrid:2:c_3_Block"/>
+          <p:cNvSpPr/>
+          <p:nvPr/>
+        </p:nvSpPr>
+        <p:spPr>
+          <a:xfrm>
+            <a:off x="7955280" y="1463040"/>
+            <a:ext cx="3566160" cy="4663440"/>
+          </a:xfrm>
+          <a:prstGeom prst="rect">
+            <a:avLst/>
+          </a:prstGeom>
+          <a:gradFill rotWithShape="1">
+            <a:gsLst>
+              <a:gs pos="0">
+                <a:srgbClr val="CF12D3"/>
+              </a:gs>
+              <a:gs pos="100000">
+                <a:srgbClr val="E82BED"/>
+              </a:gs>
+            </a:gsLst>
+            <a:lin ang="16200000" scaled="0"/>
+          </a:gradFill>
+          <a:ln w="3175">
+            <a:solidFill>
+              <a:srgbClr val="644D64"/>
+            </a:solidFill>
+          </a:ln>
+        </p:spPr>
+        <p:style>
+          <a:lnRef idx="1">
+            <a:schemeClr val="accent1"/>
+          </a:lnRef>
+          <a:fillRef idx="3">
+            <a:schemeClr val="accent1"/>
+          </a:fillRef>
+          <a:effectRef idx="2">
+            <a:schemeClr val="accent1"/>
+          </a:effectRef>
+          <a:fontRef idx="minor">
+            <a:schemeClr val="lt1"/>
+          </a:fontRef>
+        </p:style>
+        <p:txBody>
+          <a:bodyPr rtlCol="0" anchor="t" wrap="square" tIns="91440" bIns="91440"/>
+          <a:lstStyle/>
+          <a:p>
+            <a:pPr algn="l">
+              <a:spcAft>
+                <a:spcPts val="500"/>
+              </a:spcAft>
+            </a:pPr>
+            <a:r>
+              <a:rPr sz="1400" b="1">
+                <a:solidFill>
+                  <a:srgbClr val="FFFFFF"/>
+                </a:solidFill>
+              </a:rPr>
+              <a:t>Phase confusion</a:t>
+            </a:r>
+          </a:p>
+          <a:p>
+            <a:pPr algn="l">
+              <a:spcAft>
+                <a:spcPts val="0"/>
+              </a:spcAft>
+            </a:pPr>
+            <a:r>
+              <a:rPr sz="1400" b="1">
+                <a:solidFill>
+                  <a:srgbClr val="FFFFFF"/>
+                </a:solidFill>
+              </a:rPr>
+              <a:t>Symptom: </a:t>
+            </a:r>
+            <a:r>
+              <a:rPr sz="1400">
+                <a:solidFill>
+                  <a:srgbClr val="FFFFFF"/>
+                </a:solidFill>
+              </a:rPr>
+              <a:t>Create/Update runs during Phase 1-3.</a:t>
+            </a:r>
+          </a:p>
+          <a:p>
+            <a:pPr algn="l">
+              <a:spcAft>
+                <a:spcPts val="0"/>
+              </a:spcAft>
+            </a:pPr>
+            <a:r>
+              <a:rPr sz="1400" b="1">
+                <a:solidFill>
+                  <a:srgbClr val="FFFFFF"/>
+                </a:solidFill>
+              </a:rPr>
+              <a:t>Catch: </a:t>
+            </a:r>
+            <a:r>
+              <a:rPr sz="1400">
+                <a:solidFill>
+                  <a:srgbClr val="FFFFFF"/>
+                </a:solidFill>
+              </a:rPr>
+              <a:t>say "document only, not system" · revert.</a:t>
+            </a:r>
+          </a:p>
+        </p:txBody>
+      </p:sp>
+    </p:spTree>
+  </p:cSld>
+  <p:clrMapOvr>
+    <a:masterClrMapping/>
+  </p:clrMapOvr>
+</p:sld>
+</file>
+
+<file path=ppt/slides/slide12.xml><?xml version="1.0" encoding="utf-8"?>
+<p:sld xmlns:a="http://schemas.openxmlformats.org/drawingml/2006/main" xmlns:p="http://schemas.openxmlformats.org/presentationml/2006/main" xmlns:r="http://schemas.openxmlformats.org/officeDocument/2006/relationships">
+  <p:cSld>
+    <p:spTree>
+      <p:nvGrpSpPr>
+        <p:cNvPr id="1" name=""/>
+        <p:cNvGrpSpPr/>
+        <p:nvPr/>
+      </p:nvGrpSpPr>
+      <p:grpSpPr/>
+      <p:sp>
+        <p:nvSpPr>
+          <p:cNvPr id="2" name="Title 1"/>
+          <p:cNvSpPr>
+            <a:spLocks noGrp="1"/>
+          </p:cNvSpPr>
+          <p:nvPr>
+            <p:ph type="title"/>
+          </p:nvPr>
+        </p:nvSpPr>
+        <p:spPr/>
+        <p:txBody>
+          <a:bodyPr/>
+          <a:lstStyle/>
+          <a:p>
+            <a:r>
               <a:t>What you walk away with</a:t>
             </a:r>
           </a:p>
@@ -35346,7 +36299,7 @@
           <a:lstStyle/>
           <a:p>
             <a:r>
-              <a:t>What the skill teaches</a:t>
+              <a:t>Skill catalog + one example</a:t>
             </a:r>
           </a:p>
         </p:txBody>
@@ -39149,7 +40102,7 @@
           <a:lstStyle/>
           <a:p>
             <a:r>
-              <a:t>The same entity moves through the pipeline</a:t>
+              <a:t>Skill example · activating-objects</a:t>
             </a:r>
           </a:p>
         </p:txBody>
@@ -39170,7 +40123,7 @@
           <a:lstStyle/>
           <a:p>
             <a:r>
-              <a:t>AUTHOR · FROM IDEA TO OBJECT</a:t>
+              <a:t>41 LINES · ONE TASK</a:t>
             </a:r>
           </a:p>
         </p:txBody>
@@ -39218,14 +40171,14 @@
       </p:sp>
       <p:sp>
         <p:nvSpPr>
-          <p:cNvPr id="5" name="c_1_BlockGrid:0:c_1_Block"/>
+          <p:cNvPr id="5" name="c_1_Block"/>
           <p:cNvSpPr/>
           <p:nvPr/>
         </p:nvSpPr>
         <p:spPr>
           <a:xfrm>
             <a:off x="457200" y="1463040"/>
-            <a:ext cx="2697480" cy="4663440"/>
+            <a:ext cx="11064240" cy="914400"/>
           </a:xfrm>
           <a:prstGeom prst="rect">
             <a:avLst/>
@@ -39233,17 +40186,17 @@
           <a:gradFill rotWithShape="1">
             <a:gsLst>
               <a:gs pos="0">
-                <a:srgbClr val="003FE5"/>
+                <a:srgbClr val="7C7C7C"/>
               </a:gs>
               <a:gs pos="100000">
-                <a:srgbClr val="1959FF"/>
+                <a:srgbClr val="959595"/>
               </a:gs>
             </a:gsLst>
             <a:lin ang="16200000" scaled="0"/>
           </a:gradFill>
           <a:ln w="3175">
             <a:solidFill>
-              <a:srgbClr val="4B5366"/>
+              <a:srgbClr val="5F5F5F"/>
             </a:solidFill>
           </a:ln>
         </p:spPr>
@@ -39267,16 +40220,40 @@
           <a:p>
             <a:pPr algn="l">
               <a:spcAft>
-                <a:spcPts val="500"/>
+                <a:spcPts val="0"/>
               </a:spcAft>
             </a:pPr>
             <a:r>
-              <a:rPr sz="1200" b="1">
-                <a:solidFill>
-                  <a:srgbClr val="FFFFFF"/>
+              <a:rPr sz="1400" b="1">
+                <a:solidFill>
+                  <a:srgbClr val="000000"/>
                 </a:solidFill>
               </a:rPr>
-              <a:t>Phase 1 · business</a:t>
+              <a:t>name: </a:t>
+            </a:r>
+            <a:r>
+              <a:rPr sz="1400">
+                <a:solidFill>
+                  <a:srgbClr val="000000"/>
+                </a:solidFill>
+              </a:rPr>
+              <a:t>Activating Objects     </a:t>
+            </a:r>
+            <a:r>
+              <a:rPr sz="1400" b="1">
+                <a:solidFill>
+                  <a:srgbClr val="000000"/>
+                </a:solidFill>
+              </a:rPr>
+              <a:t>tags: </a:t>
+            </a:r>
+            <a:r>
+              <a:rPr sz="1400">
+                <a:solidFill>
+                  <a:srgbClr val="000000"/>
+                </a:solidFill>
+              </a:rPr>
+              <a:t>[sap, activation, governance]</a:t>
             </a:r>
           </a:p>
           <a:p>
@@ -39288,123 +40265,32 @@
             <a:r>
               <a:rPr sz="1400" b="1">
                 <a:solidFill>
-                  <a:srgbClr val="FFFFFF"/>
+                  <a:srgbClr val="000000"/>
                 </a:solidFill>
               </a:rPr>
-              <a:t>Entity: Author</a:t>
-            </a:r>
-          </a:p>
-          <a:p>
-            <a:pPr algn="l" marL="228600" indent="-182880">
-              <a:spcAft>
-                <a:spcPts val="0"/>
-              </a:spcAft>
-              <a:buClr>
-                <a:srgbClr val="FFFFFF"/>
-              </a:buClr>
-              <a:buChar char="•"/>
-            </a:pPr>
-            <a:r>
-              <a:rPr sz="900">
-                <a:solidFill>
-                  <a:srgbClr val="FFFFFF"/>
+              <a:t>description: </a:t>
+            </a:r>
+            <a:r>
+              <a:rPr sz="1400">
+                <a:solidFill>
+                  <a:srgbClr val="000000"/>
                 </a:solidFill>
               </a:rPr>
-              <a:t>Name (string 100, required)</a:t>
-            </a:r>
-          </a:p>
-          <a:p>
-            <a:pPr algn="l" marL="228600" indent="-182880">
-              <a:spcAft>
-                <a:spcPts val="0"/>
-              </a:spcAft>
-              <a:buClr>
-                <a:srgbClr val="FFFFFF"/>
-              </a:buClr>
-              <a:buChar char="•"/>
-            </a:pPr>
-            <a:r>
-              <a:rPr sz="900">
-                <a:solidFill>
-                  <a:srgbClr val="FFFFFF"/>
-                </a:solidFill>
-              </a:rPr>
-              <a:t>Country (string 50)</a:t>
-            </a:r>
-          </a:p>
-          <a:p>
-            <a:pPr algn="l" marL="228600" indent="-182880">
-              <a:spcAft>
-                <a:spcPts val="0"/>
-              </a:spcAft>
-              <a:buClr>
-                <a:srgbClr val="FFFFFF"/>
-              </a:buClr>
-              <a:buChar char="•"/>
-            </a:pPr>
-            <a:r>
-              <a:rPr sz="900">
-                <a:solidFill>
-                  <a:srgbClr val="FFFFFF"/>
-                </a:solidFill>
-              </a:rPr>
-              <a:t>Birth Year (int 4)</a:t>
-            </a:r>
-          </a:p>
-          <a:p>
-            <a:pPr algn="l" marL="228600" indent="-182880">
-              <a:spcAft>
-                <a:spcPts val="0"/>
-              </a:spcAft>
-              <a:buClr>
-                <a:srgbClr val="FFFFFF"/>
-              </a:buClr>
-              <a:buChar char="•"/>
-            </a:pPr>
-            <a:r>
-              <a:rPr sz="900">
-                <a:solidFill>
-                  <a:srgbClr val="FFFFFF"/>
-                </a:solidFill>
-              </a:rPr>
-              <a:t>Biography (text)</a:t>
-            </a:r>
-          </a:p>
-          <a:p>
-            <a:pPr algn="l">
-              <a:spcAft>
-                <a:spcPts val="0"/>
-              </a:spcAft>
-            </a:pPr>
-            <a:r>
-              <a:rPr sz="1400" b="1">
-                <a:solidFill>
-                  <a:srgbClr val="FFFFFF"/>
-                </a:solidFill>
-              </a:rPr>
-              <a:t>Rule: </a:t>
-            </a:r>
-            <a:r>
-              <a:rPr sz="1400">
-                <a:solidFill>
-                  <a:srgbClr val="FFFFFF"/>
-                </a:solidFill>
-              </a:rPr>
-              <a:t>name unique; birth-year 1000..now.</a:t>
-            </a:r>
-          </a:p>
-        </p:txBody>
-      </p:sp>
-      <p:sp>
-        <p:nvSpPr>
-          <p:cNvPr id="6" name="c_1_BlockGrid:1:c_2_Block"/>
+              <a:t>Rules for activating ABAP objects safely — never bare 'activate all', group activation for circular references, special tool for BDEF</a:t>
+            </a:r>
+          </a:p>
+        </p:txBody>
+      </p:sp>
+      <p:sp>
+        <p:nvSpPr>
+          <p:cNvPr id="6" name="c_1_BlockGrid:0:c_2_Block"/>
           <p:cNvSpPr/>
           <p:nvPr/>
         </p:nvSpPr>
         <p:spPr>
           <a:xfrm>
-            <a:off x="3246120" y="1463040"/>
-            <a:ext cx="2697480" cy="4663440"/>
+            <a:off x="457200" y="2514600"/>
+            <a:ext cx="5440680" cy="3611880"/>
           </a:xfrm>
           <a:prstGeom prst="rect">
             <a:avLst/>
@@ -39412,17 +40298,17 @@
           <a:gradFill rotWithShape="1">
             <a:gsLst>
               <a:gs pos="0">
-                <a:srgbClr val="0D6976"/>
+                <a:srgbClr val="CE0101"/>
               </a:gs>
               <a:gs pos="100000">
-                <a:srgbClr val="1292A3"/>
+                <a:srgbClr val="FC0606"/>
               </a:gs>
             </a:gsLst>
             <a:lin ang="16200000" scaled="0"/>
           </a:gradFill>
           <a:ln w="3175">
             <a:solidFill>
-              <a:srgbClr val="303B3D"/>
+              <a:srgbClr val="5D4545"/>
             </a:solidFill>
           </a:ln>
         </p:spPr>
@@ -39455,22 +40341,7 @@
                   <a:srgbClr val="FFFFFF"/>
                 </a:solidFill>
               </a:rPr>
-              <a:t>Phase 2 · spec</a:t>
-            </a:r>
-          </a:p>
-          <a:p>
-            <a:pPr algn="l">
-              <a:spcAft>
-                <a:spcPts val="0"/>
-              </a:spcAft>
-            </a:pPr>
-            <a:r>
-              <a:rPr sz="1400" b="1">
-                <a:solidFill>
-                  <a:srgbClr val="FFFFFF"/>
-                </a:solidFill>
-              </a:rPr>
-              <a:t>Table Z##_AUTHOR</a:t>
+              <a:t>Hard rules</a:t>
             </a:r>
           </a:p>
           <a:p>
@@ -39489,7 +40360,7 @@
                   <a:srgbClr val="FFFFFF"/>
                 </a:solidFill>
               </a:rPr>
-              <a:t>author_id uuid · key</a:t>
+              <a:t>Never bare 'activate all inactive' on a shared system — always filter by prefix Z##_.</a:t>
             </a:r>
           </a:p>
           <a:p>
@@ -39508,7 +40379,7 @@
                   <a:srgbClr val="FFFFFF"/>
                 </a:solidFill>
               </a:rPr>
-              <a:t>name z##_e_name (z##_d_name CHAR 100)</a:t>
+              <a:t>Syntax-check each object before activating; activation is expensive and partial failures cascade.</a:t>
             </a:r>
           </a:p>
           <a:p>
@@ -39527,7 +40398,7 @@
                   <a:srgbClr val="FFFFFF"/>
                 </a:solidFill>
               </a:rPr>
-              <a:t>country z##_e_country</a:t>
+              <a:t>Group activation for circular refs — CDS R views, CDS C views, BDEF + BIMP.</a:t>
             </a:r>
           </a:p>
           <a:p>
@@ -39546,215 +40417,21 @@
                   <a:srgbClr val="FFFFFF"/>
                 </a:solidFill>
               </a:rPr>
-              <a:t>birth_year z##_e_year (NUMC 4)</a:t>
-            </a:r>
-          </a:p>
-          <a:p>
-            <a:pPr algn="l" marL="228600" indent="-182880">
-              <a:spcAft>
-                <a:spcPts val="0"/>
-              </a:spcAft>
-              <a:buClr>
-                <a:srgbClr val="FFFFFF"/>
-              </a:buClr>
-              <a:buChar char="•"/>
-            </a:pPr>
-            <a:r>
-              <a:rPr sz="900">
-                <a:solidFill>
-                  <a:srgbClr val="FFFFFF"/>
-                </a:solidFill>
-              </a:rPr>
-              <a:t>biography STRING</a:t>
-            </a:r>
-          </a:p>
-        </p:txBody>
-      </p:sp>
-      <p:sp>
-        <p:nvSpPr>
-          <p:cNvPr id="7" name="c_1_BlockGrid:2:c_3_Block"/>
+              <a:t>BDEF: use ActivateBehaviorDefinition, not the generic ActivateObjects.</a:t>
+            </a:r>
+          </a:p>
+        </p:txBody>
+      </p:sp>
+      <p:sp>
+        <p:nvSpPr>
+          <p:cNvPr id="7" name="c_1_BlockGrid:1:c_3_Block"/>
           <p:cNvSpPr/>
           <p:nvPr/>
         </p:nvSpPr>
         <p:spPr>
           <a:xfrm>
-            <a:off x="6035040" y="1463040"/>
-            <a:ext cx="2697480" cy="4663440"/>
-          </a:xfrm>
-          <a:prstGeom prst="rect">
-            <a:avLst/>
-          </a:prstGeom>
-          <a:gradFill rotWithShape="1">
-            <a:gsLst>
-              <a:gs pos="0">
-                <a:srgbClr val="CF12D3"/>
-              </a:gs>
-              <a:gs pos="100000">
-                <a:srgbClr val="E82BED"/>
-              </a:gs>
-            </a:gsLst>
-            <a:lin ang="16200000" scaled="0"/>
-          </a:gradFill>
-          <a:ln w="3175">
-            <a:solidFill>
-              <a:srgbClr val="644D64"/>
-            </a:solidFill>
-          </a:ln>
-        </p:spPr>
-        <p:style>
-          <a:lnRef idx="1">
-            <a:schemeClr val="accent1"/>
-          </a:lnRef>
-          <a:fillRef idx="3">
-            <a:schemeClr val="accent1"/>
-          </a:fillRef>
-          <a:effectRef idx="2">
-            <a:schemeClr val="accent1"/>
-          </a:effectRef>
-          <a:fontRef idx="minor">
-            <a:schemeClr val="lt1"/>
-          </a:fontRef>
-        </p:style>
-        <p:txBody>
-          <a:bodyPr rtlCol="0" anchor="t" wrap="square" tIns="91440" bIns="91440"/>
-          <a:lstStyle/>
-          <a:p>
-            <a:pPr algn="l">
-              <a:spcAft>
-                <a:spcPts val="500"/>
-              </a:spcAft>
-            </a:pPr>
-            <a:r>
-              <a:rPr sz="1200" b="1">
-                <a:solidFill>
-                  <a:srgbClr val="FFFFFF"/>
-                </a:solidFill>
-              </a:rPr>
-              <a:t>Phase 3 · plan</a:t>
-            </a:r>
-          </a:p>
-          <a:p>
-            <a:pPr algn="l">
-              <a:spcAft>
-                <a:spcPts val="0"/>
-              </a:spcAft>
-            </a:pPr>
-            <a:r>
-              <a:rPr sz="1400" b="1">
-                <a:solidFill>
-                  <a:srgbClr val="FFFFFF"/>
-                </a:solidFill>
-              </a:rPr>
-              <a:t>Step group · Author</a:t>
-            </a:r>
-          </a:p>
-          <a:p>
-            <a:pPr algn="l" marL="228600" indent="-182880">
-              <a:spcAft>
-                <a:spcPts val="0"/>
-              </a:spcAft>
-              <a:buClr>
-                <a:srgbClr val="FFFFFF"/>
-              </a:buClr>
-              <a:buChar char="•"/>
-            </a:pPr>
-            <a:r>
-              <a:rPr sz="900">
-                <a:solidFill>
-                  <a:srgbClr val="FFFFFF"/>
-                </a:solidFill>
-              </a:rPr>
-              <a:t>1.1 create 5 domains</a:t>
-            </a:r>
-          </a:p>
-          <a:p>
-            <a:pPr algn="l" marL="228600" indent="-182880">
-              <a:spcAft>
-                <a:spcPts val="0"/>
-              </a:spcAft>
-              <a:buClr>
-                <a:srgbClr val="FFFFFF"/>
-              </a:buClr>
-              <a:buChar char="•"/>
-            </a:pPr>
-            <a:r>
-              <a:rPr sz="900">
-                <a:solidFill>
-                  <a:srgbClr val="FFFFFF"/>
-                </a:solidFill>
-              </a:rPr>
-              <a:t>1.2 create 5 data elements</a:t>
-            </a:r>
-          </a:p>
-          <a:p>
-            <a:pPr algn="l" marL="228600" indent="-182880">
-              <a:spcAft>
-                <a:spcPts val="0"/>
-              </a:spcAft>
-              <a:buClr>
-                <a:srgbClr val="FFFFFF"/>
-              </a:buClr>
-              <a:buChar char="•"/>
-            </a:pPr>
-            <a:r>
-              <a:rPr sz="900">
-                <a:solidFill>
-                  <a:srgbClr val="FFFFFF"/>
-                </a:solidFill>
-              </a:rPr>
-              <a:t>2.1 create Z##_AUTHOR + draft</a:t>
-            </a:r>
-          </a:p>
-          <a:p>
-            <a:pPr algn="l" marL="228600" indent="-182880">
-              <a:spcAft>
-                <a:spcPts val="0"/>
-              </a:spcAft>
-              <a:buClr>
-                <a:srgbClr val="FFFFFF"/>
-              </a:buClr>
-              <a:buChar char="•"/>
-            </a:pPr>
-            <a:r>
-              <a:rPr sz="900">
-                <a:solidFill>
-                  <a:srgbClr val="FFFFFF"/>
-                </a:solidFill>
-              </a:rPr>
-              <a:t>3.1 CDS Z##_R_AUTHOR + C view</a:t>
-            </a:r>
-          </a:p>
-          <a:p>
-            <a:pPr algn="l" marL="228600" indent="-182880">
-              <a:spcAft>
-                <a:spcPts val="0"/>
-              </a:spcAft>
-              <a:buClr>
-                <a:srgbClr val="FFFFFF"/>
-              </a:buClr>
-              <a:buChar char="•"/>
-            </a:pPr>
-            <a:r>
-              <a:rPr sz="900">
-                <a:solidFill>
-                  <a:srgbClr val="FFFFFF"/>
-                </a:solidFill>
-              </a:rPr>
-              <a:t>4.1 BDEF + BIMP + activate</a:t>
-            </a:r>
-          </a:p>
-        </p:txBody>
-      </p:sp>
-      <p:sp>
-        <p:nvSpPr>
-          <p:cNvPr id="8" name="c_1_BlockGrid:3:c_4_Block"/>
-          <p:cNvSpPr/>
-          <p:nvPr/>
-        </p:nvSpPr>
-        <p:spPr>
-          <a:xfrm>
-            <a:off x="8823960" y="1463040"/>
-            <a:ext cx="2697480" cy="4663440"/>
+            <a:off x="6080760" y="2514600"/>
+            <a:ext cx="5440680" cy="3611880"/>
           </a:xfrm>
           <a:prstGeom prst="rect">
             <a:avLst/>
@@ -39805,22 +40482,7 @@
                   <a:srgbClr val="000000"/>
                 </a:solidFill>
               </a:rPr>
-              <a:t>Phase 4 · objects</a:t>
-            </a:r>
-          </a:p>
-          <a:p>
-            <a:pPr algn="l">
-              <a:spcAft>
-                <a:spcPts val="0"/>
-              </a:spcAft>
-            </a:pPr>
-            <a:r>
-              <a:rPr sz="1400" b="1">
-                <a:solidFill>
-                  <a:srgbClr val="000000"/>
-                </a:solidFill>
-              </a:rPr>
-              <a:t>Active on SAP</a:t>
+              <a:t>After + common errors</a:t>
             </a:r>
           </a:p>
           <a:p>
@@ -39839,83 +40501,76 @@
                   <a:srgbClr val="000000"/>
                 </a:solidFill>
               </a:rPr>
-              <a:t>DOMA · DTEL · 5+5</a:t>
-            </a:r>
-          </a:p>
-          <a:p>
-            <a:pPr algn="l" marL="228600" indent="-182880">
+              <a:t>After: re-syntax-check; Read… each object and confirm active: true.</a:t>
+            </a:r>
+          </a:p>
+          <a:p>
+            <a:pPr algn="l">
               <a:spcAft>
                 <a:spcPts val="0"/>
               </a:spcAft>
-              <a:buClr>
-                <a:srgbClr val="000000"/>
-              </a:buClr>
-              <a:buChar char="•"/>
             </a:pPr>
             <a:r>
-              <a:rPr sz="900">
+              <a:rPr sz="1400" b="1">
                 <a:solidFill>
                   <a:srgbClr val="000000"/>
                 </a:solidFill>
               </a:rPr>
-              <a:t>TABL Z##_AUTHOR + _D draft</a:t>
-            </a:r>
-          </a:p>
-          <a:p>
-            <a:pPr algn="l" marL="228600" indent="-182880">
+              <a:t>Activated unrelated objects → </a:t>
+            </a:r>
+            <a:r>
+              <a:rPr sz="1400">
+                <a:solidFill>
+                  <a:srgbClr val="000000"/>
+                </a:solidFill>
+              </a:rPr>
+              <a:t>missing prefix filter.</a:t>
+            </a:r>
+          </a:p>
+          <a:p>
+            <a:pPr algn="l">
               <a:spcAft>
                 <a:spcPts val="0"/>
               </a:spcAft>
-              <a:buClr>
-                <a:srgbClr val="000000"/>
-              </a:buClr>
-              <a:buChar char="•"/>
             </a:pPr>
             <a:r>
-              <a:rPr sz="900">
+              <a:rPr sz="1400" b="1">
                 <a:solidFill>
                   <a:srgbClr val="000000"/>
                 </a:solidFill>
               </a:rPr>
-              <a:t>DDLS Z##_R_AUTHOR + C</a:t>
-            </a:r>
-          </a:p>
-          <a:p>
-            <a:pPr algn="l" marL="228600" indent="-182880">
+              <a:t>Still inactive after activate → </a:t>
+            </a:r>
+            <a:r>
+              <a:rPr sz="1400">
+                <a:solidFill>
+                  <a:srgbClr val="000000"/>
+                </a:solidFill>
+              </a:rPr>
+              <a:t>wrong tool (BDEF via ActivateObjects).</a:t>
+            </a:r>
+          </a:p>
+          <a:p>
+            <a:pPr algn="l">
               <a:spcAft>
                 <a:spcPts val="0"/>
               </a:spcAft>
-              <a:buClr>
-                <a:srgbClr val="000000"/>
-              </a:buClr>
-              <a:buChar char="•"/>
             </a:pPr>
             <a:r>
-              <a:rPr sz="900">
+              <a:rPr sz="1400" b="1">
                 <a:solidFill>
                   <a:srgbClr val="000000"/>
                 </a:solidFill>
               </a:rPr>
-              <a:t>BDEF + BIMP class</a:t>
-            </a:r>
-          </a:p>
-          <a:p>
-            <a:pPr algn="l" marL="228600" indent="-182880">
-              <a:spcAft>
-                <a:spcPts val="0"/>
-              </a:spcAft>
-              <a:buClr>
-                <a:srgbClr val="000000"/>
-              </a:buClr>
-              <a:buChar char="•"/>
-            </a:pPr>
-            <a:r>
-              <a:rPr sz="900">
+              <a:t>Half-active layer → </a:t>
+            </a:r>
+            <a:r>
+              <a:rPr sz="1400">
                 <a:solidFill>
                   <a:srgbClr val="000000"/>
                 </a:solidFill>
               </a:rPr>
-              <a:t>Service + binding</a:t>
+              <a:t>activated one-by-one; group-activate instead.</a:t>
             </a:r>
           </a:p>
         </p:txBody>
@@ -39954,7 +40609,7 @@
           <a:lstStyle/>
           <a:p>
             <a:r>
-              <a:t>What got built · 72 objects, all active</a:t>
+              <a:t>The same entity moves through the pipeline</a:t>
             </a:r>
           </a:p>
         </p:txBody>
@@ -39975,7 +40630,7 @@
           <a:lstStyle/>
           <a:p>
             <a:r>
-              <a:t>4 ENTITIES · 1 RAP APP</a:t>
+              <a:t>AUTHOR · FROM IDEA TO OBJECT</a:t>
             </a:r>
           </a:p>
         </p:txBody>
@@ -40023,442 +40678,14 @@
       </p:sp>
       <p:sp>
         <p:nvSpPr>
-          <p:cNvPr id="5" name="c_1_BlockGrid:0:c_1_Block:container"/>
+          <p:cNvPr id="5" name="c_1_BlockGrid:0:c_1_Block"/>
           <p:cNvSpPr/>
           <p:nvPr/>
         </p:nvSpPr>
         <p:spPr>
           <a:xfrm>
             <a:off x="457200" y="1463040"/>
-            <a:ext cx="2697480" cy="1554480"/>
-          </a:xfrm>
-          <a:prstGeom prst="rect">
-            <a:avLst/>
-          </a:prstGeom>
-          <a:noFill/>
-          <a:ln>
-            <a:noFill/>
-          </a:ln>
-        </p:spPr>
-        <p:style>
-          <a:lnRef idx="1">
-            <a:schemeClr val="accent1"/>
-          </a:lnRef>
-          <a:fillRef idx="3">
-            <a:schemeClr val="accent1"/>
-          </a:fillRef>
-          <a:effectRef idx="2">
-            <a:schemeClr val="accent1"/>
-          </a:effectRef>
-          <a:fontRef idx="minor">
-            <a:schemeClr val="lt1"/>
-          </a:fontRef>
-        </p:style>
-        <p:txBody>
-          <a:bodyPr rtlCol="0" anchor="ctr"/>
-          <a:lstStyle/>
-          <a:p>
-            <a:pPr algn="ctr"/>
-          </a:p>
-        </p:txBody>
-      </p:sp>
-      <p:sp>
-        <p:nvSpPr>
-          <p:cNvPr id="6" name="c_1_BlockGrid:0:c_1_Block:metric"/>
-          <p:cNvSpPr txBox="1"/>
-          <p:nvPr/>
-        </p:nvSpPr>
-        <p:spPr>
-          <a:xfrm>
-            <a:off x="640080" y="1600200"/>
-            <a:ext cx="2331720" cy="408939"/>
-          </a:xfrm>
-          <a:prstGeom prst="rect">
-            <a:avLst/>
-          </a:prstGeom>
-          <a:noFill/>
-        </p:spPr>
-        <p:txBody>
-          <a:bodyPr wrap="none" lIns="0" rIns="0" tIns="0" bIns="0">
-            <a:spAutoFit/>
-          </a:bodyPr>
-          <a:lstStyle/>
-          <a:p>
-            <a:pPr algn="ctr"/>
-            <a:r>
-              <a:rPr sz="2800" b="1">
-                <a:solidFill>
-                  <a:srgbClr val="107E8D"/>
-                </a:solidFill>
-              </a:rPr>
-              <a:t>72</a:t>
-            </a:r>
-          </a:p>
-        </p:txBody>
-      </p:sp>
-      <p:sp>
-        <p:nvSpPr>
-          <p:cNvPr id="7" name="c_1_BlockGrid:0:c_1_Block:content"/>
-          <p:cNvSpPr txBox="1"/>
-          <p:nvPr/>
-        </p:nvSpPr>
-        <p:spPr>
-          <a:xfrm>
-            <a:off x="640080" y="2077719"/>
-            <a:ext cx="2331720" cy="219074"/>
-          </a:xfrm>
-          <a:prstGeom prst="rect">
-            <a:avLst/>
-          </a:prstGeom>
-          <a:noFill/>
-        </p:spPr>
-        <p:txBody>
-          <a:bodyPr wrap="square" lIns="0" rIns="0" tIns="0" bIns="0" anchor="t"/>
-          <a:lstStyle/>
-          <a:p>
-            <a:pPr algn="ctr"/>
-            <a:r>
-              <a:rPr sz="1400">
-                <a:solidFill>
-                  <a:srgbClr val="000000"/>
-                </a:solidFill>
-              </a:rPr>
-              <a:t>objects active</a:t>
-            </a:r>
-          </a:p>
-        </p:txBody>
-      </p:sp>
-      <p:sp>
-        <p:nvSpPr>
-          <p:cNvPr id="8" name="c_1_BlockGrid:1:c_2_Block:container"/>
-          <p:cNvSpPr/>
-          <p:nvPr/>
-        </p:nvSpPr>
-        <p:spPr>
-          <a:xfrm>
-            <a:off x="3246120" y="1463040"/>
-            <a:ext cx="2697480" cy="1554480"/>
-          </a:xfrm>
-          <a:prstGeom prst="rect">
-            <a:avLst/>
-          </a:prstGeom>
-          <a:noFill/>
-          <a:ln>
-            <a:noFill/>
-          </a:ln>
-        </p:spPr>
-        <p:style>
-          <a:lnRef idx="1">
-            <a:schemeClr val="accent1"/>
-          </a:lnRef>
-          <a:fillRef idx="3">
-            <a:schemeClr val="accent1"/>
-          </a:fillRef>
-          <a:effectRef idx="2">
-            <a:schemeClr val="accent1"/>
-          </a:effectRef>
-          <a:fontRef idx="minor">
-            <a:schemeClr val="lt1"/>
-          </a:fontRef>
-        </p:style>
-        <p:txBody>
-          <a:bodyPr rtlCol="0" anchor="ctr"/>
-          <a:lstStyle/>
-          <a:p>
-            <a:pPr algn="ctr"/>
-          </a:p>
-        </p:txBody>
-      </p:sp>
-      <p:sp>
-        <p:nvSpPr>
-          <p:cNvPr id="9" name="c_1_BlockGrid:1:c_2_Block:metric"/>
-          <p:cNvSpPr txBox="1"/>
-          <p:nvPr/>
-        </p:nvSpPr>
-        <p:spPr>
-          <a:xfrm>
-            <a:off x="3429000" y="1600200"/>
-            <a:ext cx="2331720" cy="408939"/>
-          </a:xfrm>
-          <a:prstGeom prst="rect">
-            <a:avLst/>
-          </a:prstGeom>
-          <a:noFill/>
-        </p:spPr>
-        <p:txBody>
-          <a:bodyPr wrap="none" lIns="0" rIns="0" tIns="0" bIns="0">
-            <a:spAutoFit/>
-          </a:bodyPr>
-          <a:lstStyle/>
-          <a:p>
-            <a:pPr algn="ctr"/>
-            <a:r>
-              <a:rPr sz="2800" b="1">
-                <a:solidFill>
-                  <a:srgbClr val="0047FF"/>
-                </a:solidFill>
-              </a:rPr>
-              <a:t>77</a:t>
-            </a:r>
-          </a:p>
-        </p:txBody>
-      </p:sp>
-      <p:sp>
-        <p:nvSpPr>
-          <p:cNvPr id="10" name="c_1_BlockGrid:1:c_2_Block:content"/>
-          <p:cNvSpPr txBox="1"/>
-          <p:nvPr/>
-        </p:nvSpPr>
-        <p:spPr>
-          <a:xfrm>
-            <a:off x="3429000" y="2077719"/>
-            <a:ext cx="2331720" cy="219074"/>
-          </a:xfrm>
-          <a:prstGeom prst="rect">
-            <a:avLst/>
-          </a:prstGeom>
-          <a:noFill/>
-        </p:spPr>
-        <p:txBody>
-          <a:bodyPr wrap="square" lIns="0" rIns="0" tIns="0" bIns="0" anchor="t"/>
-          <a:lstStyle/>
-          <a:p>
-            <a:pPr algn="ctr"/>
-            <a:r>
-              <a:rPr sz="1400">
-                <a:solidFill>
-                  <a:srgbClr val="000000"/>
-                </a:solidFill>
-              </a:rPr>
-              <a:t>API prompts in P4</a:t>
-            </a:r>
-          </a:p>
-        </p:txBody>
-      </p:sp>
-      <p:sp>
-        <p:nvSpPr>
-          <p:cNvPr id="11" name="c_1_BlockGrid:2:c_3_Block:container"/>
-          <p:cNvSpPr/>
-          <p:nvPr/>
-        </p:nvSpPr>
-        <p:spPr>
-          <a:xfrm>
-            <a:off x="6035040" y="1463040"/>
-            <a:ext cx="2697480" cy="1554480"/>
-          </a:xfrm>
-          <a:prstGeom prst="rect">
-            <a:avLst/>
-          </a:prstGeom>
-          <a:noFill/>
-          <a:ln>
-            <a:noFill/>
-          </a:ln>
-        </p:spPr>
-        <p:style>
-          <a:lnRef idx="1">
-            <a:schemeClr val="accent1"/>
-          </a:lnRef>
-          <a:fillRef idx="3">
-            <a:schemeClr val="accent1"/>
-          </a:fillRef>
-          <a:effectRef idx="2">
-            <a:schemeClr val="accent1"/>
-          </a:effectRef>
-          <a:fontRef idx="minor">
-            <a:schemeClr val="lt1"/>
-          </a:fontRef>
-        </p:style>
-        <p:txBody>
-          <a:bodyPr rtlCol="0" anchor="ctr"/>
-          <a:lstStyle/>
-          <a:p>
-            <a:pPr algn="ctr"/>
-          </a:p>
-        </p:txBody>
-      </p:sp>
-      <p:sp>
-        <p:nvSpPr>
-          <p:cNvPr id="12" name="c_1_BlockGrid:2:c_3_Block:metric"/>
-          <p:cNvSpPr txBox="1"/>
-          <p:nvPr/>
-        </p:nvSpPr>
-        <p:spPr>
-          <a:xfrm>
-            <a:off x="6217920" y="1600200"/>
-            <a:ext cx="2331720" cy="408939"/>
-          </a:xfrm>
-          <a:prstGeom prst="rect">
-            <a:avLst/>
-          </a:prstGeom>
-          <a:noFill/>
-        </p:spPr>
-        <p:txBody>
-          <a:bodyPr wrap="none" lIns="0" rIns="0" tIns="0" bIns="0">
-            <a:spAutoFit/>
-          </a:bodyPr>
-          <a:lstStyle/>
-          <a:p>
-            <a:pPr algn="ctr"/>
-            <a:r>
-              <a:rPr sz="2800" b="1">
-                <a:solidFill>
-                  <a:srgbClr val="E06C00"/>
-                </a:solidFill>
-              </a:rPr>
-              <a:t>~$19</a:t>
-            </a:r>
-          </a:p>
-        </p:txBody>
-      </p:sp>
-      <p:sp>
-        <p:nvSpPr>
-          <p:cNvPr id="13" name="c_1_BlockGrid:2:c_3_Block:content"/>
-          <p:cNvSpPr txBox="1"/>
-          <p:nvPr/>
-        </p:nvSpPr>
-        <p:spPr>
-          <a:xfrm>
-            <a:off x="6217920" y="2077719"/>
-            <a:ext cx="2331720" cy="219074"/>
-          </a:xfrm>
-          <a:prstGeom prst="rect">
-            <a:avLst/>
-          </a:prstGeom>
-          <a:noFill/>
-        </p:spPr>
-        <p:txBody>
-          <a:bodyPr wrap="square" lIns="0" rIns="0" tIns="0" bIns="0" anchor="t"/>
-          <a:lstStyle/>
-          <a:p>
-            <a:pPr algn="ctr"/>
-            <a:r>
-              <a:rPr sz="1400">
-                <a:solidFill>
-                  <a:srgbClr val="000000"/>
-                </a:solidFill>
-              </a:rPr>
-              <a:t>API cost · vs ~$2k manual</a:t>
-            </a:r>
-          </a:p>
-        </p:txBody>
-      </p:sp>
-      <p:sp>
-        <p:nvSpPr>
-          <p:cNvPr id="14" name="c_1_BlockGrid:3:c_4_Block:container"/>
-          <p:cNvSpPr/>
-          <p:nvPr/>
-        </p:nvSpPr>
-        <p:spPr>
-          <a:xfrm>
-            <a:off x="8823960" y="1463040"/>
-            <a:ext cx="2697480" cy="1554480"/>
-          </a:xfrm>
-          <a:prstGeom prst="rect">
-            <a:avLst/>
-          </a:prstGeom>
-          <a:noFill/>
-          <a:ln>
-            <a:noFill/>
-          </a:ln>
-        </p:spPr>
-        <p:style>
-          <a:lnRef idx="1">
-            <a:schemeClr val="accent1"/>
-          </a:lnRef>
-          <a:fillRef idx="3">
-            <a:schemeClr val="accent1"/>
-          </a:fillRef>
-          <a:effectRef idx="2">
-            <a:schemeClr val="accent1"/>
-          </a:effectRef>
-          <a:fontRef idx="minor">
-            <a:schemeClr val="lt1"/>
-          </a:fontRef>
-        </p:style>
-        <p:txBody>
-          <a:bodyPr rtlCol="0" anchor="ctr"/>
-          <a:lstStyle/>
-          <a:p>
-            <a:pPr algn="ctr"/>
-          </a:p>
-        </p:txBody>
-      </p:sp>
-      <p:sp>
-        <p:nvSpPr>
-          <p:cNvPr id="15" name="c_1_BlockGrid:3:c_4_Block:metric"/>
-          <p:cNvSpPr txBox="1"/>
-          <p:nvPr/>
-        </p:nvSpPr>
-        <p:spPr>
-          <a:xfrm>
-            <a:off x="9006840" y="1600200"/>
-            <a:ext cx="2331720" cy="408939"/>
-          </a:xfrm>
-          <a:prstGeom prst="rect">
-            <a:avLst/>
-          </a:prstGeom>
-          <a:noFill/>
-        </p:spPr>
-        <p:txBody>
-          <a:bodyPr wrap="none" lIns="0" rIns="0" tIns="0" bIns="0">
-            <a:spAutoFit/>
-          </a:bodyPr>
-          <a:lstStyle/>
-          <a:p>
-            <a:pPr algn="ctr"/>
-            <a:r>
-              <a:rPr sz="2800" b="1">
-                <a:solidFill>
-                  <a:srgbClr val="E614EB"/>
-                </a:solidFill>
-              </a:rPr>
-              <a:t>~3h</a:t>
-            </a:r>
-          </a:p>
-        </p:txBody>
-      </p:sp>
-      <p:sp>
-        <p:nvSpPr>
-          <p:cNvPr id="16" name="c_1_BlockGrid:3:c_4_Block:content"/>
-          <p:cNvSpPr txBox="1"/>
-          <p:nvPr/>
-        </p:nvSpPr>
-        <p:spPr>
-          <a:xfrm>
-            <a:off x="9006840" y="2077719"/>
-            <a:ext cx="2331720" cy="219074"/>
-          </a:xfrm>
-          <a:prstGeom prst="rect">
-            <a:avLst/>
-          </a:prstGeom>
-          <a:noFill/>
-        </p:spPr>
-        <p:txBody>
-          <a:bodyPr wrap="square" lIns="0" rIns="0" tIns="0" bIns="0" anchor="t"/>
-          <a:lstStyle/>
-          <a:p>
-            <a:pPr algn="ctr"/>
-            <a:r>
-              <a:rPr sz="1400">
-                <a:solidFill>
-                  <a:srgbClr val="000000"/>
-                </a:solidFill>
-              </a:rPr>
-              <a:t>wall-clock · vs ~2 weeks</a:t>
-            </a:r>
-          </a:p>
-        </p:txBody>
-      </p:sp>
-      <p:sp>
-        <p:nvSpPr>
-          <p:cNvPr id="17" name="c_2_BlockGrid:0:c_5_Block"/>
-          <p:cNvSpPr/>
-          <p:nvPr/>
-        </p:nvSpPr>
-        <p:spPr>
-          <a:xfrm>
-            <a:off x="457200" y="3200400"/>
-            <a:ext cx="3566160" cy="2926080"/>
+            <a:ext cx="2697480" cy="4663440"/>
           </a:xfrm>
           <a:prstGeom prst="rect">
             <a:avLst/>
@@ -40504,12 +40731,27 @@
               </a:spcAft>
             </a:pPr>
             <a:r>
+              <a:rPr sz="1200" b="1">
+                <a:solidFill>
+                  <a:srgbClr val="FFFFFF"/>
+                </a:solidFill>
+              </a:rPr>
+              <a:t>Phase 1 · business</a:t>
+            </a:r>
+          </a:p>
+          <a:p>
+            <a:pPr algn="l">
+              <a:spcAft>
+                <a:spcPts val="0"/>
+              </a:spcAft>
+            </a:pPr>
+            <a:r>
               <a:rPr sz="1400" b="1">
                 <a:solidFill>
                   <a:srgbClr val="FFFFFF"/>
                 </a:solidFill>
               </a:rPr>
-              <a:t>DDIC layer</a:t>
+              <a:t>Entity: Author</a:t>
             </a:r>
           </a:p>
           <a:p>
@@ -40523,12 +40765,12 @@
               <a:buChar char="•"/>
             </a:pPr>
             <a:r>
-              <a:rPr sz="1100">
+              <a:rPr sz="900">
                 <a:solidFill>
                   <a:srgbClr val="FFFFFF"/>
                 </a:solidFill>
               </a:rPr>
-              <a:t>20 domains (DOMA)</a:t>
+              <a:t>Name (string 100, required)</a:t>
             </a:r>
           </a:p>
           <a:p>
@@ -40542,12 +40784,12 @@
               <a:buChar char="•"/>
             </a:pPr>
             <a:r>
-              <a:rPr sz="1100">
+              <a:rPr sz="900">
                 <a:solidFill>
                   <a:srgbClr val="FFFFFF"/>
                 </a:solidFill>
               </a:rPr>
-              <a:t>20 data elements (DTEL)</a:t>
+              <a:t>Country (string 50)</a:t>
             </a:r>
           </a:p>
           <a:p>
@@ -40561,12 +40803,12 @@
               <a:buChar char="•"/>
             </a:pPr>
             <a:r>
-              <a:rPr sz="1100">
+              <a:rPr sz="900">
                 <a:solidFill>
                   <a:srgbClr val="FFFFFF"/>
                 </a:solidFill>
               </a:rPr>
-              <a:t>4 persistent tables (TABL)</a:t>
+              <a:t>Birth Year (int 4)</a:t>
             </a:r>
           </a:p>
           <a:p>
@@ -40580,26 +40822,49 @@
               <a:buChar char="•"/>
             </a:pPr>
             <a:r>
-              <a:rPr sz="1100">
+              <a:rPr sz="900">
                 <a:solidFill>
                   <a:srgbClr val="FFFFFF"/>
                 </a:solidFill>
               </a:rPr>
-              <a:t>4 draft tables (TABL _D)</a:t>
-            </a:r>
-          </a:p>
-        </p:txBody>
-      </p:sp>
-      <p:sp>
-        <p:nvSpPr>
-          <p:cNvPr id="18" name="c_2_BlockGrid:1:c_6_Block"/>
+              <a:t>Biography (text)</a:t>
+            </a:r>
+          </a:p>
+          <a:p>
+            <a:pPr algn="l">
+              <a:spcAft>
+                <a:spcPts val="0"/>
+              </a:spcAft>
+            </a:pPr>
+            <a:r>
+              <a:rPr sz="1400" b="1">
+                <a:solidFill>
+                  <a:srgbClr val="FFFFFF"/>
+                </a:solidFill>
+              </a:rPr>
+              <a:t>Rule: </a:t>
+            </a:r>
+            <a:r>
+              <a:rPr sz="1400">
+                <a:solidFill>
+                  <a:srgbClr val="FFFFFF"/>
+                </a:solidFill>
+              </a:rPr>
+              <a:t>name unique; birth-year 1000..now.</a:t>
+            </a:r>
+          </a:p>
+        </p:txBody>
+      </p:sp>
+      <p:sp>
+        <p:nvSpPr>
+          <p:cNvPr id="6" name="c_1_BlockGrid:1:c_2_Block"/>
           <p:cNvSpPr/>
           <p:nvPr/>
         </p:nvSpPr>
         <p:spPr>
           <a:xfrm>
-            <a:off x="4206240" y="3200400"/>
-            <a:ext cx="3566160" cy="2926080"/>
+            <a:off x="3246120" y="1463040"/>
+            <a:ext cx="2697480" cy="4663440"/>
           </a:xfrm>
           <a:prstGeom prst="rect">
             <a:avLst/>
@@ -40645,12 +40910,27 @@
               </a:spcAft>
             </a:pPr>
             <a:r>
+              <a:rPr sz="1200" b="1">
+                <a:solidFill>
+                  <a:srgbClr val="FFFFFF"/>
+                </a:solidFill>
+              </a:rPr>
+              <a:t>Phase 2 · spec</a:t>
+            </a:r>
+          </a:p>
+          <a:p>
+            <a:pPr algn="l">
+              <a:spcAft>
+                <a:spcPts val="0"/>
+              </a:spcAft>
+            </a:pPr>
+            <a:r>
               <a:rPr sz="1400" b="1">
                 <a:solidFill>
                   <a:srgbClr val="FFFFFF"/>
                 </a:solidFill>
               </a:rPr>
-              <a:t>RAP layer</a:t>
+              <a:t>Table Z##_AUTHOR</a:t>
             </a:r>
           </a:p>
           <a:p>
@@ -40664,12 +40944,12 @@
               <a:buChar char="•"/>
             </a:pPr>
             <a:r>
-              <a:rPr sz="1100">
+              <a:rPr sz="900">
                 <a:solidFill>
                   <a:srgbClr val="FFFFFF"/>
                 </a:solidFill>
               </a:rPr>
-              <a:t>4 interface CDS (Z##_R_*)</a:t>
+              <a:t>author_id uuid · key</a:t>
             </a:r>
           </a:p>
           <a:p>
@@ -40683,12 +40963,12 @@
               <a:buChar char="•"/>
             </a:pPr>
             <a:r>
-              <a:rPr sz="1100">
+              <a:rPr sz="900">
                 <a:solidFill>
                   <a:srgbClr val="FFFFFF"/>
                 </a:solidFill>
               </a:rPr>
-              <a:t>4 projection CDS (Z##_C_*)</a:t>
+              <a:t>name z##_e_name (z##_d_name CHAR 100)</a:t>
             </a:r>
           </a:p>
           <a:p>
@@ -40702,12 +40982,12 @@
               <a:buChar char="•"/>
             </a:pPr>
             <a:r>
-              <a:rPr sz="1100">
+              <a:rPr sz="900">
                 <a:solidFill>
                   <a:srgbClr val="FFFFFF"/>
                 </a:solidFill>
               </a:rPr>
-              <a:t>4 metadata extensions</a:t>
+              <a:t>country z##_e_country</a:t>
             </a:r>
           </a:p>
           <a:p>
@@ -40721,26 +41001,220 @@
               <a:buChar char="•"/>
             </a:pPr>
             <a:r>
-              <a:rPr sz="1100">
+              <a:rPr sz="900">
                 <a:solidFill>
                   <a:srgbClr val="FFFFFF"/>
                 </a:solidFill>
               </a:rPr>
-              <a:t>4 BDEF + 4 BIMP classes</a:t>
-            </a:r>
-          </a:p>
-        </p:txBody>
-      </p:sp>
-      <p:sp>
-        <p:nvSpPr>
-          <p:cNvPr id="19" name="c_2_BlockGrid:2:c_7_Block"/>
+              <a:t>birth_year z##_e_year (NUMC 4)</a:t>
+            </a:r>
+          </a:p>
+          <a:p>
+            <a:pPr algn="l" marL="228600" indent="-182880">
+              <a:spcAft>
+                <a:spcPts val="0"/>
+              </a:spcAft>
+              <a:buClr>
+                <a:srgbClr val="FFFFFF"/>
+              </a:buClr>
+              <a:buChar char="•"/>
+            </a:pPr>
+            <a:r>
+              <a:rPr sz="900">
+                <a:solidFill>
+                  <a:srgbClr val="FFFFFF"/>
+                </a:solidFill>
+              </a:rPr>
+              <a:t>biography STRING</a:t>
+            </a:r>
+          </a:p>
+        </p:txBody>
+      </p:sp>
+      <p:sp>
+        <p:nvSpPr>
+          <p:cNvPr id="7" name="c_1_BlockGrid:2:c_3_Block"/>
           <p:cNvSpPr/>
           <p:nvPr/>
         </p:nvSpPr>
         <p:spPr>
           <a:xfrm>
-            <a:off x="7955280" y="3200400"/>
-            <a:ext cx="3566160" cy="2926080"/>
+            <a:off x="6035040" y="1463040"/>
+            <a:ext cx="2697480" cy="4663440"/>
+          </a:xfrm>
+          <a:prstGeom prst="rect">
+            <a:avLst/>
+          </a:prstGeom>
+          <a:gradFill rotWithShape="1">
+            <a:gsLst>
+              <a:gs pos="0">
+                <a:srgbClr val="CF12D3"/>
+              </a:gs>
+              <a:gs pos="100000">
+                <a:srgbClr val="E82BED"/>
+              </a:gs>
+            </a:gsLst>
+            <a:lin ang="16200000" scaled="0"/>
+          </a:gradFill>
+          <a:ln w="3175">
+            <a:solidFill>
+              <a:srgbClr val="644D64"/>
+            </a:solidFill>
+          </a:ln>
+        </p:spPr>
+        <p:style>
+          <a:lnRef idx="1">
+            <a:schemeClr val="accent1"/>
+          </a:lnRef>
+          <a:fillRef idx="3">
+            <a:schemeClr val="accent1"/>
+          </a:fillRef>
+          <a:effectRef idx="2">
+            <a:schemeClr val="accent1"/>
+          </a:effectRef>
+          <a:fontRef idx="minor">
+            <a:schemeClr val="lt1"/>
+          </a:fontRef>
+        </p:style>
+        <p:txBody>
+          <a:bodyPr rtlCol="0" anchor="t" wrap="square" tIns="91440" bIns="91440"/>
+          <a:lstStyle/>
+          <a:p>
+            <a:pPr algn="l">
+              <a:spcAft>
+                <a:spcPts val="500"/>
+              </a:spcAft>
+            </a:pPr>
+            <a:r>
+              <a:rPr sz="1200" b="1">
+                <a:solidFill>
+                  <a:srgbClr val="FFFFFF"/>
+                </a:solidFill>
+              </a:rPr>
+              <a:t>Phase 3 · plan</a:t>
+            </a:r>
+          </a:p>
+          <a:p>
+            <a:pPr algn="l">
+              <a:spcAft>
+                <a:spcPts val="0"/>
+              </a:spcAft>
+            </a:pPr>
+            <a:r>
+              <a:rPr sz="1400" b="1">
+                <a:solidFill>
+                  <a:srgbClr val="FFFFFF"/>
+                </a:solidFill>
+              </a:rPr>
+              <a:t>Step group · Author</a:t>
+            </a:r>
+          </a:p>
+          <a:p>
+            <a:pPr algn="l" marL="228600" indent="-182880">
+              <a:spcAft>
+                <a:spcPts val="0"/>
+              </a:spcAft>
+              <a:buClr>
+                <a:srgbClr val="FFFFFF"/>
+              </a:buClr>
+              <a:buChar char="•"/>
+            </a:pPr>
+            <a:r>
+              <a:rPr sz="900">
+                <a:solidFill>
+                  <a:srgbClr val="FFFFFF"/>
+                </a:solidFill>
+              </a:rPr>
+              <a:t>1.1 create 5 domains</a:t>
+            </a:r>
+          </a:p>
+          <a:p>
+            <a:pPr algn="l" marL="228600" indent="-182880">
+              <a:spcAft>
+                <a:spcPts val="0"/>
+              </a:spcAft>
+              <a:buClr>
+                <a:srgbClr val="FFFFFF"/>
+              </a:buClr>
+              <a:buChar char="•"/>
+            </a:pPr>
+            <a:r>
+              <a:rPr sz="900">
+                <a:solidFill>
+                  <a:srgbClr val="FFFFFF"/>
+                </a:solidFill>
+              </a:rPr>
+              <a:t>1.2 create 5 data elements</a:t>
+            </a:r>
+          </a:p>
+          <a:p>
+            <a:pPr algn="l" marL="228600" indent="-182880">
+              <a:spcAft>
+                <a:spcPts val="0"/>
+              </a:spcAft>
+              <a:buClr>
+                <a:srgbClr val="FFFFFF"/>
+              </a:buClr>
+              <a:buChar char="•"/>
+            </a:pPr>
+            <a:r>
+              <a:rPr sz="900">
+                <a:solidFill>
+                  <a:srgbClr val="FFFFFF"/>
+                </a:solidFill>
+              </a:rPr>
+              <a:t>2.1 create Z##_AUTHOR + draft</a:t>
+            </a:r>
+          </a:p>
+          <a:p>
+            <a:pPr algn="l" marL="228600" indent="-182880">
+              <a:spcAft>
+                <a:spcPts val="0"/>
+              </a:spcAft>
+              <a:buClr>
+                <a:srgbClr val="FFFFFF"/>
+              </a:buClr>
+              <a:buChar char="•"/>
+            </a:pPr>
+            <a:r>
+              <a:rPr sz="900">
+                <a:solidFill>
+                  <a:srgbClr val="FFFFFF"/>
+                </a:solidFill>
+              </a:rPr>
+              <a:t>3.1 CDS Z##_R_AUTHOR + C view</a:t>
+            </a:r>
+          </a:p>
+          <a:p>
+            <a:pPr algn="l" marL="228600" indent="-182880">
+              <a:spcAft>
+                <a:spcPts val="0"/>
+              </a:spcAft>
+              <a:buClr>
+                <a:srgbClr val="FFFFFF"/>
+              </a:buClr>
+              <a:buChar char="•"/>
+            </a:pPr>
+            <a:r>
+              <a:rPr sz="900">
+                <a:solidFill>
+                  <a:srgbClr val="FFFFFF"/>
+                </a:solidFill>
+              </a:rPr>
+              <a:t>4.1 BDEF + BIMP + activate</a:t>
+            </a:r>
+          </a:p>
+        </p:txBody>
+      </p:sp>
+      <p:sp>
+        <p:nvSpPr>
+          <p:cNvPr id="8" name="c_1_BlockGrid:3:c_4_Block"/>
+          <p:cNvSpPr/>
+          <p:nvPr/>
+        </p:nvSpPr>
+        <p:spPr>
+          <a:xfrm>
+            <a:off x="8823960" y="1463040"/>
+            <a:ext cx="2697480" cy="4663440"/>
           </a:xfrm>
           <a:prstGeom prst="rect">
             <a:avLst/>
@@ -40786,12 +41260,27 @@
               </a:spcAft>
             </a:pPr>
             <a:r>
+              <a:rPr sz="1200" b="1">
+                <a:solidFill>
+                  <a:srgbClr val="000000"/>
+                </a:solidFill>
+              </a:rPr>
+              <a:t>Phase 4 · objects</a:t>
+            </a:r>
+          </a:p>
+          <a:p>
+            <a:pPr algn="l">
+              <a:spcAft>
+                <a:spcPts val="0"/>
+              </a:spcAft>
+            </a:pPr>
+            <a:r>
               <a:rPr sz="1400" b="1">
                 <a:solidFill>
                   <a:srgbClr val="000000"/>
                 </a:solidFill>
               </a:rPr>
-              <a:t>Service · UI</a:t>
+              <a:t>Active on SAP</a:t>
             </a:r>
           </a:p>
           <a:p>
@@ -40805,12 +41294,12 @@
               <a:buChar char="•"/>
             </a:pPr>
             <a:r>
-              <a:rPr sz="1100">
+              <a:rPr sz="900">
                 <a:solidFill>
                   <a:srgbClr val="000000"/>
                 </a:solidFill>
               </a:rPr>
-              <a:t>1 service definition</a:t>
+              <a:t>DOMA · DTEL · 5+5</a:t>
             </a:r>
           </a:p>
           <a:p>
@@ -40824,12 +41313,12 @@
               <a:buChar char="•"/>
             </a:pPr>
             <a:r>
-              <a:rPr sz="1100">
+              <a:rPr sz="900">
                 <a:solidFill>
                   <a:srgbClr val="000000"/>
                 </a:solidFill>
               </a:rPr>
-              <a:t>1 OData V4 binding (published)</a:t>
+              <a:t>TABL Z##_AUTHOR + _D draft</a:t>
             </a:r>
           </a:p>
           <a:p>
@@ -40843,12 +41332,12 @@
               <a:buChar char="•"/>
             </a:pPr>
             <a:r>
-              <a:rPr sz="1100">
+              <a:rPr sz="900">
                 <a:solidFill>
                   <a:srgbClr val="000000"/>
                 </a:solidFill>
               </a:rPr>
-              <a:t>Fiori Elements preview · CRUD + draft</a:t>
+              <a:t>DDLS Z##_R_AUTHOR + C</a:t>
             </a:r>
           </a:p>
           <a:p>
@@ -40862,12 +41351,31 @@
               <a:buChar char="•"/>
             </a:pPr>
             <a:r>
-              <a:rPr sz="1100">
+              <a:rPr sz="900">
                 <a:solidFill>
                   <a:srgbClr val="000000"/>
                 </a:solidFill>
               </a:rPr>
-              <a:t>Author shows by name, not UUID</a:t>
+              <a:t>BDEF + BIMP class</a:t>
+            </a:r>
+          </a:p>
+          <a:p>
+            <a:pPr algn="l" marL="228600" indent="-182880">
+              <a:spcAft>
+                <a:spcPts val="0"/>
+              </a:spcAft>
+              <a:buClr>
+                <a:srgbClr val="000000"/>
+              </a:buClr>
+              <a:buChar char="•"/>
+            </a:pPr>
+            <a:r>
+              <a:rPr sz="900">
+                <a:solidFill>
+                  <a:srgbClr val="000000"/>
+                </a:solidFill>
+              </a:rPr>
+              <a:t>Service + binding</a:t>
             </a:r>
           </a:p>
         </p:txBody>

--- a/docs/tutorials/rap-bo-book-catalog/examples/book-catalog/report.simple-deck.pptx
+++ b/docs/tutorials/rap-bo-book-catalog/examples/book-catalog/report.simple-deck.pptx
@@ -40102,7 +40102,7 @@
           <a:lstStyle/>
           <a:p>
             <a:r>
-              <a:t>Skill example · activating-objects</a:t>
+              <a:t>Skill example · activating-objects.md</a:t>
             </a:r>
           </a:p>
         </p:txBody>
@@ -40123,7 +40123,7 @@
           <a:lstStyle/>
           <a:p>
             <a:r>
-              <a:t>41 LINES · ONE TASK</a:t>
+              <a:t>WHOLE FILE · AS-IS</a:t>
             </a:r>
           </a:p>
         </p:txBody>
@@ -40178,7 +40178,7 @@
         <p:spPr>
           <a:xfrm>
             <a:off x="457200" y="1463040"/>
-            <a:ext cx="11064240" cy="914400"/>
+            <a:ext cx="11064240" cy="4663440"/>
           </a:xfrm>
           <a:prstGeom prst="rect">
             <a:avLst/>
@@ -40224,36 +40224,12 @@
               </a:spcAft>
             </a:pPr>
             <a:r>
-              <a:rPr sz="1400" b="1">
+              <a:rPr sz="700">
                 <a:solidFill>
                   <a:srgbClr val="000000"/>
                 </a:solidFill>
               </a:rPr>
-              <a:t>name: </a:t>
-            </a:r>
-            <a:r>
-              <a:rPr sz="1400">
-                <a:solidFill>
-                  <a:srgbClr val="000000"/>
-                </a:solidFill>
-              </a:rPr>
-              <a:t>Activating Objects     </a:t>
-            </a:r>
-            <a:r>
-              <a:rPr sz="1400" b="1">
-                <a:solidFill>
-                  <a:srgbClr val="000000"/>
-                </a:solidFill>
-              </a:rPr>
-              <a:t>tags: </a:t>
-            </a:r>
-            <a:r>
-              <a:rPr sz="1400">
-                <a:solidFill>
-                  <a:srgbClr val="000000"/>
-                </a:solidFill>
-              </a:rPr>
-              <a:t>[sap, activation, governance]</a:t>
+              <a:t>name: Activating Objects</a:t>
             </a:r>
           </a:p>
           <a:p>
@@ -40263,245 +40239,12 @@
               </a:spcAft>
             </a:pPr>
             <a:r>
-              <a:rPr sz="1400" b="1">
+              <a:rPr sz="700">
                 <a:solidFill>
                   <a:srgbClr val="000000"/>
                 </a:solidFill>
               </a:rPr>
-              <a:t>description: </a:t>
-            </a:r>
-            <a:r>
-              <a:rPr sz="1400">
-                <a:solidFill>
-                  <a:srgbClr val="000000"/>
-                </a:solidFill>
-              </a:rPr>
-              <a:t>Rules for activating ABAP objects safely — never bare 'activate all', group activation for circular references, special tool for BDEF</a:t>
-            </a:r>
-          </a:p>
-        </p:txBody>
-      </p:sp>
-      <p:sp>
-        <p:nvSpPr>
-          <p:cNvPr id="6" name="c_1_BlockGrid:0:c_2_Block"/>
-          <p:cNvSpPr/>
-          <p:nvPr/>
-        </p:nvSpPr>
-        <p:spPr>
-          <a:xfrm>
-            <a:off x="457200" y="2514600"/>
-            <a:ext cx="5440680" cy="3611880"/>
-          </a:xfrm>
-          <a:prstGeom prst="rect">
-            <a:avLst/>
-          </a:prstGeom>
-          <a:gradFill rotWithShape="1">
-            <a:gsLst>
-              <a:gs pos="0">
-                <a:srgbClr val="CE0101"/>
-              </a:gs>
-              <a:gs pos="100000">
-                <a:srgbClr val="FC0606"/>
-              </a:gs>
-            </a:gsLst>
-            <a:lin ang="16200000" scaled="0"/>
-          </a:gradFill>
-          <a:ln w="3175">
-            <a:solidFill>
-              <a:srgbClr val="5D4545"/>
-            </a:solidFill>
-          </a:ln>
-        </p:spPr>
-        <p:style>
-          <a:lnRef idx="1">
-            <a:schemeClr val="accent1"/>
-          </a:lnRef>
-          <a:fillRef idx="3">
-            <a:schemeClr val="accent1"/>
-          </a:fillRef>
-          <a:effectRef idx="2">
-            <a:schemeClr val="accent1"/>
-          </a:effectRef>
-          <a:fontRef idx="minor">
-            <a:schemeClr val="lt1"/>
-          </a:fontRef>
-        </p:style>
-        <p:txBody>
-          <a:bodyPr rtlCol="0" anchor="t" wrap="square" tIns="91440" bIns="91440"/>
-          <a:lstStyle/>
-          <a:p>
-            <a:pPr algn="l">
-              <a:spcAft>
-                <a:spcPts val="500"/>
-              </a:spcAft>
-            </a:pPr>
-            <a:r>
-              <a:rPr sz="1200" b="1">
-                <a:solidFill>
-                  <a:srgbClr val="FFFFFF"/>
-                </a:solidFill>
-              </a:rPr>
-              <a:t>Hard rules</a:t>
-            </a:r>
-          </a:p>
-          <a:p>
-            <a:pPr algn="l" marL="228600" indent="-182880">
-              <a:spcAft>
-                <a:spcPts val="0"/>
-              </a:spcAft>
-              <a:buClr>
-                <a:srgbClr val="FFFFFF"/>
-              </a:buClr>
-              <a:buChar char="•"/>
-            </a:pPr>
-            <a:r>
-              <a:rPr sz="900">
-                <a:solidFill>
-                  <a:srgbClr val="FFFFFF"/>
-                </a:solidFill>
-              </a:rPr>
-              <a:t>Never bare 'activate all inactive' on a shared system — always filter by prefix Z##_.</a:t>
-            </a:r>
-          </a:p>
-          <a:p>
-            <a:pPr algn="l" marL="228600" indent="-182880">
-              <a:spcAft>
-                <a:spcPts val="0"/>
-              </a:spcAft>
-              <a:buClr>
-                <a:srgbClr val="FFFFFF"/>
-              </a:buClr>
-              <a:buChar char="•"/>
-            </a:pPr>
-            <a:r>
-              <a:rPr sz="900">
-                <a:solidFill>
-                  <a:srgbClr val="FFFFFF"/>
-                </a:solidFill>
-              </a:rPr>
-              <a:t>Syntax-check each object before activating; activation is expensive and partial failures cascade.</a:t>
-            </a:r>
-          </a:p>
-          <a:p>
-            <a:pPr algn="l" marL="228600" indent="-182880">
-              <a:spcAft>
-                <a:spcPts val="0"/>
-              </a:spcAft>
-              <a:buClr>
-                <a:srgbClr val="FFFFFF"/>
-              </a:buClr>
-              <a:buChar char="•"/>
-            </a:pPr>
-            <a:r>
-              <a:rPr sz="900">
-                <a:solidFill>
-                  <a:srgbClr val="FFFFFF"/>
-                </a:solidFill>
-              </a:rPr>
-              <a:t>Group activation for circular refs — CDS R views, CDS C views, BDEF + BIMP.</a:t>
-            </a:r>
-          </a:p>
-          <a:p>
-            <a:pPr algn="l" marL="228600" indent="-182880">
-              <a:spcAft>
-                <a:spcPts val="0"/>
-              </a:spcAft>
-              <a:buClr>
-                <a:srgbClr val="FFFFFF"/>
-              </a:buClr>
-              <a:buChar char="•"/>
-            </a:pPr>
-            <a:r>
-              <a:rPr sz="900">
-                <a:solidFill>
-                  <a:srgbClr val="FFFFFF"/>
-                </a:solidFill>
-              </a:rPr>
-              <a:t>BDEF: use ActivateBehaviorDefinition, not the generic ActivateObjects.</a:t>
-            </a:r>
-          </a:p>
-        </p:txBody>
-      </p:sp>
-      <p:sp>
-        <p:nvSpPr>
-          <p:cNvPr id="7" name="c_1_BlockGrid:1:c_3_Block"/>
-          <p:cNvSpPr/>
-          <p:nvPr/>
-        </p:nvSpPr>
-        <p:spPr>
-          <a:xfrm>
-            <a:off x="6080760" y="2514600"/>
-            <a:ext cx="5440680" cy="3611880"/>
-          </a:xfrm>
-          <a:prstGeom prst="rect">
-            <a:avLst/>
-          </a:prstGeom>
-          <a:gradFill rotWithShape="1">
-            <a:gsLst>
-              <a:gs pos="0">
-                <a:srgbClr val="C65F00"/>
-              </a:gs>
-              <a:gs pos="100000">
-                <a:srgbClr val="F97800"/>
-              </a:gs>
-            </a:gsLst>
-            <a:lin ang="16200000" scaled="0"/>
-          </a:gradFill>
-          <a:ln w="3175">
-            <a:solidFill>
-              <a:srgbClr val="5A4D42"/>
-            </a:solidFill>
-          </a:ln>
-        </p:spPr>
-        <p:style>
-          <a:lnRef idx="1">
-            <a:schemeClr val="accent1"/>
-          </a:lnRef>
-          <a:fillRef idx="3">
-            <a:schemeClr val="accent1"/>
-          </a:fillRef>
-          <a:effectRef idx="2">
-            <a:schemeClr val="accent1"/>
-          </a:effectRef>
-          <a:fontRef idx="minor">
-            <a:schemeClr val="lt1"/>
-          </a:fontRef>
-        </p:style>
-        <p:txBody>
-          <a:bodyPr rtlCol="0" anchor="t" wrap="square" tIns="91440" bIns="91440"/>
-          <a:lstStyle/>
-          <a:p>
-            <a:pPr algn="l">
-              <a:spcAft>
-                <a:spcPts val="500"/>
-              </a:spcAft>
-            </a:pPr>
-            <a:r>
-              <a:rPr sz="1200" b="1">
-                <a:solidFill>
-                  <a:srgbClr val="000000"/>
-                </a:solidFill>
-              </a:rPr>
-              <a:t>After + common errors</a:t>
-            </a:r>
-          </a:p>
-          <a:p>
-            <a:pPr algn="l" marL="228600" indent="-182880">
-              <a:spcAft>
-                <a:spcPts val="0"/>
-              </a:spcAft>
-              <a:buClr>
-                <a:srgbClr val="000000"/>
-              </a:buClr>
-              <a:buChar char="•"/>
-            </a:pPr>
-            <a:r>
-              <a:rPr sz="900">
-                <a:solidFill>
-                  <a:srgbClr val="000000"/>
-                </a:solidFill>
-              </a:rPr>
-              <a:t>After: re-syntax-check; Read… each object and confirm active: true.</a:t>
+              <a:t>description: Rules for activating ABAP objects safely — never bare "activate all",</a:t>
             </a:r>
           </a:p>
           <a:p>
@@ -40511,20 +40254,12 @@
               </a:spcAft>
             </a:pPr>
             <a:r>
-              <a:rPr sz="1400" b="1">
+              <a:rPr sz="700">
                 <a:solidFill>
                   <a:srgbClr val="000000"/>
                 </a:solidFill>
               </a:rPr>
-              <a:t>Activated unrelated objects → </a:t>
-            </a:r>
-            <a:r>
-              <a:rPr sz="1400">
-                <a:solidFill>
-                  <a:srgbClr val="000000"/>
-                </a:solidFill>
-              </a:rPr>
-              <a:t>missing prefix filter.</a:t>
+              <a:t>             group activation for circular references, special tool for BDEF.</a:t>
             </a:r>
           </a:p>
           <a:p>
@@ -40534,20 +40269,12 @@
               </a:spcAft>
             </a:pPr>
             <a:r>
-              <a:rPr sz="1400" b="1">
+              <a:rPr sz="700">
                 <a:solidFill>
                   <a:srgbClr val="000000"/>
                 </a:solidFill>
               </a:rPr>
-              <a:t>Still inactive after activate → </a:t>
-            </a:r>
-            <a:r>
-              <a:rPr sz="1400">
-                <a:solidFill>
-                  <a:srgbClr val="000000"/>
-                </a:solidFill>
-              </a:rPr>
-              <a:t>wrong tool (BDEF via ActivateObjects).</a:t>
+              <a:t>tags: [sap, activation, governance]</a:t>
             </a:r>
           </a:p>
           <a:p>
@@ -40557,20 +40284,387 @@
               </a:spcAft>
             </a:pPr>
             <a:r>
-              <a:rPr sz="1400" b="1">
+              <a:rPr sz="700">
                 <a:solidFill>
                   <a:srgbClr val="000000"/>
                 </a:solidFill>
               </a:rPr>
-              <a:t>Half-active layer → </a:t>
-            </a:r>
-            <a:r>
-              <a:rPr sz="1400">
+              <a:t> </a:t>
+            </a:r>
+          </a:p>
+          <a:p>
+            <a:pPr algn="l">
+              <a:spcAft>
+                <a:spcPts val="0"/>
+              </a:spcAft>
+            </a:pPr>
+            <a:r>
+              <a:rPr sz="700">
                 <a:solidFill>
                   <a:srgbClr val="000000"/>
                 </a:solidFill>
               </a:rPr>
-              <a:t>activated one-by-one; group-activate instead.</a:t>
+              <a:t># Activating Objects</a:t>
+            </a:r>
+          </a:p>
+          <a:p>
+            <a:pPr algn="l">
+              <a:spcAft>
+                <a:spcPts val="0"/>
+              </a:spcAft>
+            </a:pPr>
+            <a:r>
+              <a:rPr sz="700">
+                <a:solidFill>
+                  <a:srgbClr val="000000"/>
+                </a:solidFill>
+              </a:rPr>
+              <a:t> </a:t>
+            </a:r>
+          </a:p>
+          <a:p>
+            <a:pPr algn="l">
+              <a:spcAft>
+                <a:spcPts val="0"/>
+              </a:spcAft>
+            </a:pPr>
+            <a:r>
+              <a:rPr sz="700">
+                <a:solidFill>
+                  <a:srgbClr val="000000"/>
+                </a:solidFill>
+              </a:rPr>
+              <a:t>Activation locks objects and may fail partway through, leaving the system in an</a:t>
+            </a:r>
+          </a:p>
+          <a:p>
+            <a:pPr algn="l">
+              <a:spcAft>
+                <a:spcPts val="0"/>
+              </a:spcAft>
+            </a:pPr>
+            <a:r>
+              <a:rPr sz="700">
+                <a:solidFill>
+                  <a:srgbClr val="000000"/>
+                </a:solidFill>
+              </a:rPr>
+              <a:t>inconsistent state. The rules below are about safety and correctness, not speed.</a:t>
+            </a:r>
+          </a:p>
+          <a:p>
+            <a:pPr algn="l">
+              <a:spcAft>
+                <a:spcPts val="0"/>
+              </a:spcAft>
+            </a:pPr>
+            <a:r>
+              <a:rPr sz="700">
+                <a:solidFill>
+                  <a:srgbClr val="000000"/>
+                </a:solidFill>
+              </a:rPr>
+              <a:t> </a:t>
+            </a:r>
+          </a:p>
+          <a:p>
+            <a:pPr algn="l">
+              <a:spcAft>
+                <a:spcPts val="0"/>
+              </a:spcAft>
+            </a:pPr>
+            <a:r>
+              <a:rPr sz="700">
+                <a:solidFill>
+                  <a:srgbClr val="000000"/>
+                </a:solidFill>
+              </a:rPr>
+              <a:t>## Hard rules</a:t>
+            </a:r>
+          </a:p>
+          <a:p>
+            <a:pPr algn="l">
+              <a:spcAft>
+                <a:spcPts val="0"/>
+              </a:spcAft>
+            </a:pPr>
+            <a:r>
+              <a:rPr sz="700">
+                <a:solidFill>
+                  <a:srgbClr val="000000"/>
+                </a:solidFill>
+              </a:rPr>
+              <a:t> </a:t>
+            </a:r>
+          </a:p>
+          <a:p>
+            <a:pPr algn="l">
+              <a:spcAft>
+                <a:spcPts val="0"/>
+              </a:spcAft>
+            </a:pPr>
+            <a:r>
+              <a:rPr sz="700">
+                <a:solidFill>
+                  <a:srgbClr val="000000"/>
+                </a:solidFill>
+              </a:rPr>
+              <a:t>- Never run bare "Activate all inactive objects" on a shared system — filter by prefix Z##_.</a:t>
+            </a:r>
+          </a:p>
+          <a:p>
+            <a:pPr algn="l">
+              <a:spcAft>
+                <a:spcPts val="0"/>
+              </a:spcAft>
+            </a:pPr>
+            <a:r>
+              <a:rPr sz="700">
+                <a:solidFill>
+                  <a:srgbClr val="000000"/>
+                </a:solidFill>
+              </a:rPr>
+              <a:t>- Check before activating. Partial failures cascade; activation is expensive.</a:t>
+            </a:r>
+          </a:p>
+          <a:p>
+            <a:pPr algn="l">
+              <a:spcAft>
+                <a:spcPts val="0"/>
+              </a:spcAft>
+            </a:pPr>
+            <a:r>
+              <a:rPr sz="700">
+                <a:solidFill>
+                  <a:srgbClr val="000000"/>
+                </a:solidFill>
+              </a:rPr>
+              <a:t>- Group activation for circular references (CDS R-views, C-views). Create all,</a:t>
+            </a:r>
+          </a:p>
+          <a:p>
+            <a:pPr algn="l">
+              <a:spcAft>
+                <a:spcPts val="0"/>
+              </a:spcAft>
+            </a:pPr>
+            <a:r>
+              <a:rPr sz="700">
+                <a:solidFill>
+                  <a:srgbClr val="000000"/>
+                </a:solidFill>
+              </a:rPr>
+              <a:t>  activate together. Pre-activation "data source not active" errors disappear after.</a:t>
+            </a:r>
+          </a:p>
+          <a:p>
+            <a:pPr algn="l">
+              <a:spcAft>
+                <a:spcPts val="0"/>
+              </a:spcAft>
+            </a:pPr>
+            <a:r>
+              <a:rPr sz="700">
+                <a:solidFill>
+                  <a:srgbClr val="000000"/>
+                </a:solidFill>
+              </a:rPr>
+              <a:t>- BDEF + BIMP must be activated together — circular dependency.</a:t>
+            </a:r>
+          </a:p>
+          <a:p>
+            <a:pPr algn="l">
+              <a:spcAft>
+                <a:spcPts val="0"/>
+              </a:spcAft>
+            </a:pPr>
+            <a:r>
+              <a:rPr sz="700">
+                <a:solidFill>
+                  <a:srgbClr val="000000"/>
+                </a:solidFill>
+              </a:rPr>
+              <a:t>- BDEFs: call ActivateBehaviorDefinition. ActivateObjects is for DDIC and CDS.</a:t>
+            </a:r>
+          </a:p>
+          <a:p>
+            <a:pPr algn="l">
+              <a:spcAft>
+                <a:spcPts val="0"/>
+              </a:spcAft>
+            </a:pPr>
+            <a:r>
+              <a:rPr sz="700">
+                <a:solidFill>
+                  <a:srgbClr val="000000"/>
+                </a:solidFill>
+              </a:rPr>
+              <a:t> </a:t>
+            </a:r>
+          </a:p>
+          <a:p>
+            <a:pPr algn="l">
+              <a:spcAft>
+                <a:spcPts val="0"/>
+              </a:spcAft>
+            </a:pPr>
+            <a:r>
+              <a:rPr sz="700">
+                <a:solidFill>
+                  <a:srgbClr val="000000"/>
+                </a:solidFill>
+              </a:rPr>
+              <a:t>## After activation</a:t>
+            </a:r>
+          </a:p>
+          <a:p>
+            <a:pPr algn="l">
+              <a:spcAft>
+                <a:spcPts val="0"/>
+              </a:spcAft>
+            </a:pPr>
+            <a:r>
+              <a:rPr sz="700">
+                <a:solidFill>
+                  <a:srgbClr val="000000"/>
+                </a:solidFill>
+              </a:rPr>
+              <a:t> </a:t>
+            </a:r>
+          </a:p>
+          <a:p>
+            <a:pPr algn="l">
+              <a:spcAft>
+                <a:spcPts val="0"/>
+              </a:spcAft>
+            </a:pPr>
+            <a:r>
+              <a:rPr sz="700">
+                <a:solidFill>
+                  <a:srgbClr val="000000"/>
+                </a:solidFill>
+              </a:rPr>
+              <a:t>- Re-run syntax check on each object to surface warnings hidden by earlier errors.</a:t>
+            </a:r>
+          </a:p>
+          <a:p>
+            <a:pPr algn="l">
+              <a:spcAft>
+                <a:spcPts val="0"/>
+              </a:spcAft>
+            </a:pPr>
+            <a:r>
+              <a:rPr sz="700">
+                <a:solidFill>
+                  <a:srgbClr val="000000"/>
+                </a:solidFill>
+              </a:rPr>
+              <a:t>- Verify with Read… calls per object — response must include active: true.</a:t>
+            </a:r>
+          </a:p>
+          <a:p>
+            <a:pPr algn="l">
+              <a:spcAft>
+                <a:spcPts val="0"/>
+              </a:spcAft>
+            </a:pPr>
+            <a:r>
+              <a:rPr sz="700">
+                <a:solidFill>
+                  <a:srgbClr val="000000"/>
+                </a:solidFill>
+              </a:rPr>
+              <a:t> </a:t>
+            </a:r>
+          </a:p>
+          <a:p>
+            <a:pPr algn="l">
+              <a:spcAft>
+                <a:spcPts val="0"/>
+              </a:spcAft>
+            </a:pPr>
+            <a:r>
+              <a:rPr sz="700">
+                <a:solidFill>
+                  <a:srgbClr val="000000"/>
+                </a:solidFill>
+              </a:rPr>
+              <a:t>## Common error fix</a:t>
+            </a:r>
+          </a:p>
+          <a:p>
+            <a:pPr algn="l">
+              <a:spcAft>
+                <a:spcPts val="0"/>
+              </a:spcAft>
+            </a:pPr>
+            <a:r>
+              <a:rPr sz="700">
+                <a:solidFill>
+                  <a:srgbClr val="000000"/>
+                </a:solidFill>
+              </a:rPr>
+              <a:t> </a:t>
+            </a:r>
+          </a:p>
+          <a:p>
+            <a:pPr algn="l">
+              <a:spcAft>
+                <a:spcPts val="0"/>
+              </a:spcAft>
+            </a:pPr>
+            <a:r>
+              <a:rPr sz="700">
+                <a:solidFill>
+                  <a:srgbClr val="000000"/>
+                </a:solidFill>
+              </a:rPr>
+              <a:t>  Activated unrelated objects   → bare "activate all inactive"          → pass prefix filter</a:t>
+            </a:r>
+          </a:p>
+          <a:p>
+            <a:pPr algn="l">
+              <a:spcAft>
+                <a:spcPts val="0"/>
+              </a:spcAft>
+            </a:pPr>
+            <a:r>
+              <a:rPr sz="700">
+                <a:solidFill>
+                  <a:srgbClr val="000000"/>
+                </a:solidFill>
+              </a:rPr>
+              <a:t>  Still inactive after activate → BDEF via ActivateObjects               → use ActivateBehaviorDefinition</a:t>
+            </a:r>
+          </a:p>
+          <a:p>
+            <a:pPr algn="l">
+              <a:spcAft>
+                <a:spcPts val="0"/>
+              </a:spcAft>
+            </a:pPr>
+            <a:r>
+              <a:rPr sz="700">
+                <a:solidFill>
+                  <a:srgbClr val="000000"/>
+                </a:solidFill>
+              </a:rPr>
+              <a:t>  Half-active layer             → activated one-by-one (circular refs)   → group-activate whole layer</a:t>
+            </a:r>
+          </a:p>
+          <a:p>
+            <a:pPr algn="l">
+              <a:spcAft>
+                <a:spcPts val="0"/>
+              </a:spcAft>
+            </a:pPr>
+            <a:r>
+              <a:rPr sz="700">
+                <a:solidFill>
+                  <a:srgbClr val="000000"/>
+                </a:solidFill>
+              </a:rPr>
+              <a:t>  Syntax clean, activate fails  → prerequisite layer not active          → activate prerequisite first</a:t>
             </a:r>
           </a:p>
         </p:txBody>

--- a/docs/tutorials/rap-bo-book-catalog/examples/book-catalog/report.simple-deck.pptx
+++ b/docs/tutorials/rap-bo-book-catalog/examples/book-catalog/report.simple-deck.pptx
@@ -40183,21 +40183,9 @@
           <a:prstGeom prst="rect">
             <a:avLst/>
           </a:prstGeom>
-          <a:gradFill rotWithShape="1">
-            <a:gsLst>
-              <a:gs pos="0">
-                <a:srgbClr val="7C7C7C"/>
-              </a:gs>
-              <a:gs pos="100000">
-                <a:srgbClr val="959595"/>
-              </a:gs>
-            </a:gsLst>
-            <a:lin ang="16200000" scaled="0"/>
-          </a:gradFill>
-          <a:ln w="3175">
-            <a:solidFill>
-              <a:srgbClr val="5F5F5F"/>
-            </a:solidFill>
+          <a:noFill/>
+          <a:ln>
+            <a:noFill/>
           </a:ln>
         </p:spPr>
         <p:style>
@@ -40215,7 +40203,7 @@
           </a:fontRef>
         </p:style>
         <p:txBody>
-          <a:bodyPr rtlCol="0" anchor="t" wrap="square" tIns="91440" bIns="91440"/>
+          <a:bodyPr rtlCol="0" anchor="t" wrap="square" lIns="45720" rIns="45720" tIns="36576" bIns="36576"/>
           <a:lstStyle/>
           <a:p>
             <a:pPr algn="l">
@@ -40224,7 +40212,7 @@
               </a:spcAft>
             </a:pPr>
             <a:r>
-              <a:rPr sz="700">
+              <a:rPr sz="900">
                 <a:solidFill>
                   <a:srgbClr val="000000"/>
                 </a:solidFill>
@@ -40239,12 +40227,12 @@
               </a:spcAft>
             </a:pPr>
             <a:r>
-              <a:rPr sz="700">
+              <a:rPr sz="900">
                 <a:solidFill>
                   <a:srgbClr val="000000"/>
                 </a:solidFill>
               </a:rPr>
-              <a:t>description: Rules for activating ABAP objects safely — never bare "activate all",</a:t>
+              <a:t>tags: [sap, activation, governance]</a:t>
             </a:r>
           </a:p>
           <a:p>
@@ -40254,12 +40242,12 @@
               </a:spcAft>
             </a:pPr>
             <a:r>
-              <a:rPr sz="700">
+              <a:rPr sz="900">
                 <a:solidFill>
                   <a:srgbClr val="000000"/>
                 </a:solidFill>
               </a:rPr>
-              <a:t>             group activation for circular references, special tool for BDEF.</a:t>
+              <a:t> </a:t>
             </a:r>
           </a:p>
           <a:p>
@@ -40269,12 +40257,12 @@
               </a:spcAft>
             </a:pPr>
             <a:r>
-              <a:rPr sz="700">
+              <a:rPr sz="900">
                 <a:solidFill>
                   <a:srgbClr val="000000"/>
                 </a:solidFill>
               </a:rPr>
-              <a:t>tags: [sap, activation, governance]</a:t>
+              <a:t># Activating Objects</a:t>
             </a:r>
           </a:p>
           <a:p>
@@ -40284,7 +40272,7 @@
               </a:spcAft>
             </a:pPr>
             <a:r>
-              <a:rPr sz="700">
+              <a:rPr sz="900">
                 <a:solidFill>
                   <a:srgbClr val="000000"/>
                 </a:solidFill>
@@ -40299,12 +40287,12 @@
               </a:spcAft>
             </a:pPr>
             <a:r>
-              <a:rPr sz="700">
+              <a:rPr sz="900">
                 <a:solidFill>
                   <a:srgbClr val="000000"/>
                 </a:solidFill>
               </a:rPr>
-              <a:t># Activating Objects</a:t>
+              <a:t>## Hard rules</a:t>
             </a:r>
           </a:p>
           <a:p>
@@ -40314,7 +40302,7 @@
               </a:spcAft>
             </a:pPr>
             <a:r>
-              <a:rPr sz="700">
+              <a:rPr sz="900">
                 <a:solidFill>
                   <a:srgbClr val="000000"/>
                 </a:solidFill>
@@ -40329,12 +40317,12 @@
               </a:spcAft>
             </a:pPr>
             <a:r>
-              <a:rPr sz="700">
+              <a:rPr sz="900">
                 <a:solidFill>
                   <a:srgbClr val="000000"/>
                 </a:solidFill>
               </a:rPr>
-              <a:t>Activation locks objects and may fail partway through, leaving the system in an</a:t>
+              <a:t>- Never bare "Activate all inactive objects" — filter by prefix Z##_.</a:t>
             </a:r>
           </a:p>
           <a:p>
@@ -40344,12 +40332,12 @@
               </a:spcAft>
             </a:pPr>
             <a:r>
-              <a:rPr sz="700">
+              <a:rPr sz="900">
                 <a:solidFill>
                   <a:srgbClr val="000000"/>
                 </a:solidFill>
               </a:rPr>
-              <a:t>inconsistent state. The rules below are about safety and correctness, not speed.</a:t>
+              <a:t>- Check before activating. Partial failures cascade.</a:t>
             </a:r>
           </a:p>
           <a:p>
@@ -40359,12 +40347,12 @@
               </a:spcAft>
             </a:pPr>
             <a:r>
-              <a:rPr sz="700">
+              <a:rPr sz="900">
                 <a:solidFill>
                   <a:srgbClr val="000000"/>
                 </a:solidFill>
               </a:rPr>
-              <a:t> </a:t>
+              <a:t>- Group activation for circular refs (CDS R-views, C-views).</a:t>
             </a:r>
           </a:p>
           <a:p>
@@ -40374,12 +40362,12 @@
               </a:spcAft>
             </a:pPr>
             <a:r>
-              <a:rPr sz="700">
+              <a:rPr sz="900">
                 <a:solidFill>
                   <a:srgbClr val="000000"/>
                 </a:solidFill>
               </a:rPr>
-              <a:t>## Hard rules</a:t>
+              <a:t>- BDEF + BIMP must be activated together.</a:t>
             </a:r>
           </a:p>
           <a:p>
@@ -40389,12 +40377,12 @@
               </a:spcAft>
             </a:pPr>
             <a:r>
-              <a:rPr sz="700">
+              <a:rPr sz="900">
                 <a:solidFill>
                   <a:srgbClr val="000000"/>
                 </a:solidFill>
               </a:rPr>
-              <a:t> </a:t>
+              <a:t>- BDEFs: ActivateBehaviorDefinition. ActivateObjects = DDIC + CDS only.</a:t>
             </a:r>
           </a:p>
           <a:p>
@@ -40404,12 +40392,12 @@
               </a:spcAft>
             </a:pPr>
             <a:r>
-              <a:rPr sz="700">
+              <a:rPr sz="900">
                 <a:solidFill>
                   <a:srgbClr val="000000"/>
                 </a:solidFill>
               </a:rPr>
-              <a:t>- Never run bare "Activate all inactive objects" on a shared system — filter by prefix Z##_.</a:t>
+              <a:t> </a:t>
             </a:r>
           </a:p>
           <a:p>
@@ -40419,12 +40407,12 @@
               </a:spcAft>
             </a:pPr>
             <a:r>
-              <a:rPr sz="700">
+              <a:rPr sz="900">
                 <a:solidFill>
                   <a:srgbClr val="000000"/>
                 </a:solidFill>
               </a:rPr>
-              <a:t>- Check before activating. Partial failures cascade; activation is expensive.</a:t>
+              <a:t>## After activation</a:t>
             </a:r>
           </a:p>
           <a:p>
@@ -40434,12 +40422,12 @@
               </a:spcAft>
             </a:pPr>
             <a:r>
-              <a:rPr sz="700">
+              <a:rPr sz="900">
                 <a:solidFill>
                   <a:srgbClr val="000000"/>
                 </a:solidFill>
               </a:rPr>
-              <a:t>- Group activation for circular references (CDS R-views, C-views). Create all,</a:t>
+              <a:t> </a:t>
             </a:r>
           </a:p>
           <a:p>
@@ -40449,12 +40437,12 @@
               </a:spcAft>
             </a:pPr>
             <a:r>
-              <a:rPr sz="700">
+              <a:rPr sz="900">
                 <a:solidFill>
                   <a:srgbClr val="000000"/>
                 </a:solidFill>
               </a:rPr>
-              <a:t>  activate together. Pre-activation "data source not active" errors disappear after.</a:t>
+              <a:t>- Re-run syntax check to surface warnings hidden by earlier errors.</a:t>
             </a:r>
           </a:p>
           <a:p>
@@ -40464,12 +40452,12 @@
               </a:spcAft>
             </a:pPr>
             <a:r>
-              <a:rPr sz="700">
+              <a:rPr sz="900">
                 <a:solidFill>
                   <a:srgbClr val="000000"/>
                 </a:solidFill>
               </a:rPr>
-              <a:t>- BDEF + BIMP must be activated together — circular dependency.</a:t>
+              <a:t>- Read… each object — response must include active: true.</a:t>
             </a:r>
           </a:p>
           <a:p>
@@ -40479,12 +40467,12 @@
               </a:spcAft>
             </a:pPr>
             <a:r>
-              <a:rPr sz="700">
+              <a:rPr sz="900">
                 <a:solidFill>
                   <a:srgbClr val="000000"/>
                 </a:solidFill>
               </a:rPr>
-              <a:t>- BDEFs: call ActivateBehaviorDefinition. ActivateObjects is for DDIC and CDS.</a:t>
+              <a:t> </a:t>
             </a:r>
           </a:p>
           <a:p>
@@ -40494,12 +40482,12 @@
               </a:spcAft>
             </a:pPr>
             <a:r>
-              <a:rPr sz="700">
+              <a:rPr sz="900">
                 <a:solidFill>
                   <a:srgbClr val="000000"/>
                 </a:solidFill>
               </a:rPr>
-              <a:t> </a:t>
+              <a:t>## Common error fix</a:t>
             </a:r>
           </a:p>
           <a:p>
@@ -40509,12 +40497,12 @@
               </a:spcAft>
             </a:pPr>
             <a:r>
-              <a:rPr sz="700">
+              <a:rPr sz="900">
                 <a:solidFill>
                   <a:srgbClr val="000000"/>
                 </a:solidFill>
               </a:rPr>
-              <a:t>## After activation</a:t>
+              <a:t> </a:t>
             </a:r>
           </a:p>
           <a:p>
@@ -40524,12 +40512,12 @@
               </a:spcAft>
             </a:pPr>
             <a:r>
-              <a:rPr sz="700">
+              <a:rPr sz="900">
                 <a:solidFill>
                   <a:srgbClr val="000000"/>
                 </a:solidFill>
               </a:rPr>
-              <a:t> </a:t>
+              <a:t>  Activated unrelated objects   → missing prefix filter</a:t>
             </a:r>
           </a:p>
           <a:p>
@@ -40539,12 +40527,12 @@
               </a:spcAft>
             </a:pPr>
             <a:r>
-              <a:rPr sz="700">
+              <a:rPr sz="900">
                 <a:solidFill>
                   <a:srgbClr val="000000"/>
                 </a:solidFill>
               </a:rPr>
-              <a:t>- Re-run syntax check on each object to surface warnings hidden by earlier errors.</a:t>
+              <a:t>  Still inactive after activate → wrong tool: use ActivateBehaviorDefinition</a:t>
             </a:r>
           </a:p>
           <a:p>
@@ -40554,12 +40542,12 @@
               </a:spcAft>
             </a:pPr>
             <a:r>
-              <a:rPr sz="700">
+              <a:rPr sz="900">
                 <a:solidFill>
                   <a:srgbClr val="000000"/>
                 </a:solidFill>
               </a:rPr>
-              <a:t>- Verify with Read… calls per object — response must include active: true.</a:t>
+              <a:t>  Half-active layer             → activated one-by-one; group-activate whole layer</a:t>
             </a:r>
           </a:p>
           <a:p>
@@ -40569,102 +40557,12 @@
               </a:spcAft>
             </a:pPr>
             <a:r>
-              <a:rPr sz="700">
+              <a:rPr sz="900">
                 <a:solidFill>
                   <a:srgbClr val="000000"/>
                 </a:solidFill>
               </a:rPr>
-              <a:t> </a:t>
-            </a:r>
-          </a:p>
-          <a:p>
-            <a:pPr algn="l">
-              <a:spcAft>
-                <a:spcPts val="0"/>
-              </a:spcAft>
-            </a:pPr>
-            <a:r>
-              <a:rPr sz="700">
-                <a:solidFill>
-                  <a:srgbClr val="000000"/>
-                </a:solidFill>
-              </a:rPr>
-              <a:t>## Common error fix</a:t>
-            </a:r>
-          </a:p>
-          <a:p>
-            <a:pPr algn="l">
-              <a:spcAft>
-                <a:spcPts val="0"/>
-              </a:spcAft>
-            </a:pPr>
-            <a:r>
-              <a:rPr sz="700">
-                <a:solidFill>
-                  <a:srgbClr val="000000"/>
-                </a:solidFill>
-              </a:rPr>
-              <a:t> </a:t>
-            </a:r>
-          </a:p>
-          <a:p>
-            <a:pPr algn="l">
-              <a:spcAft>
-                <a:spcPts val="0"/>
-              </a:spcAft>
-            </a:pPr>
-            <a:r>
-              <a:rPr sz="700">
-                <a:solidFill>
-                  <a:srgbClr val="000000"/>
-                </a:solidFill>
-              </a:rPr>
-              <a:t>  Activated unrelated objects   → bare "activate all inactive"          → pass prefix filter</a:t>
-            </a:r>
-          </a:p>
-          <a:p>
-            <a:pPr algn="l">
-              <a:spcAft>
-                <a:spcPts val="0"/>
-              </a:spcAft>
-            </a:pPr>
-            <a:r>
-              <a:rPr sz="700">
-                <a:solidFill>
-                  <a:srgbClr val="000000"/>
-                </a:solidFill>
-              </a:rPr>
-              <a:t>  Still inactive after activate → BDEF via ActivateObjects               → use ActivateBehaviorDefinition</a:t>
-            </a:r>
-          </a:p>
-          <a:p>
-            <a:pPr algn="l">
-              <a:spcAft>
-                <a:spcPts val="0"/>
-              </a:spcAft>
-            </a:pPr>
-            <a:r>
-              <a:rPr sz="700">
-                <a:solidFill>
-                  <a:srgbClr val="000000"/>
-                </a:solidFill>
-              </a:rPr>
-              <a:t>  Half-active layer             → activated one-by-one (circular refs)   → group-activate whole layer</a:t>
-            </a:r>
-          </a:p>
-          <a:p>
-            <a:pPr algn="l">
-              <a:spcAft>
-                <a:spcPts val="0"/>
-              </a:spcAft>
-            </a:pPr>
-            <a:r>
-              <a:rPr sz="700">
-                <a:solidFill>
-                  <a:srgbClr val="000000"/>
-                </a:solidFill>
-              </a:rPr>
-              <a:t>  Syntax clean, activate fails  → prerequisite layer not active          → activate prerequisite first</a:t>
+              <a:t>  Syntax clean, activate fails  → prerequisite layer not active</a:t>
             </a:r>
           </a:p>
         </p:txBody>
